--- a/Sprint_Review_Presentation.pptx
+++ b/Sprint_Review_Presentation.pptx
@@ -15,9 +15,11 @@
     <p:sldId id="263" r:id="rId9"/>
     <p:sldId id="264" r:id="rId10"/>
     <p:sldId id="265" r:id="rId11"/>
+    <p:sldId id="266" r:id="rId12"/>
+    <p:sldId id="267" r:id="rId13"/>
   </p:sldIdLst>
   <p:notesMasterIdLst>
-    <p:notesMasterId r:id="rId12"/>
+    <p:notesMasterId r:id="rId14"/>
   </p:notesMasterIdLst>
   <p:sldSz cx="9144000" cy="5143500"/>
   <p:notesSz cx="5143500" cy="9144000"/>
@@ -623,6 +625,182 @@
             <a:fld id="{F7021451-1387-4CA6-816F-3879F97B5CBC}" type="slidenum">
               <a:rPr lang="en-US"/>
               <a:t>10</a:t>
+            </a:fld>
+            <a:endParaRPr lang="en-US"/>
+          </a:p>
+        </p:txBody>
+      </p:sp>
+    </p:spTree>
+    <p:extLst>
+      <p:ext uri="{BB962C8B-B14F-4D97-AF65-F5344CB8AC3E}">
+        <p14:creationId xmlns:p14="http://schemas.microsoft.com/office/powerpoint/2010/main" val="1024086991"/>
+      </p:ext>
+    </p:extLst>
+  </p:cSld>
+  <p:clrMapOvr>
+    <a:masterClrMapping/>
+  </p:clrMapOvr>
+</p:notes>
+</file>
+
+<file path=ppt/notesSlides/notesSlide11.xml><?xml version="1.0" encoding="utf-8"?>
+<p:notes xmlns:a="http://schemas.openxmlformats.org/drawingml/2006/main" xmlns:r="http://schemas.openxmlformats.org/officeDocument/2006/relationships" xmlns:p="http://schemas.openxmlformats.org/presentationml/2006/main">
+  <p:cSld>
+    <p:spTree>
+      <p:nvGrpSpPr>
+        <p:cNvPr id="1" name=""/>
+        <p:cNvGrpSpPr/>
+        <p:nvPr/>
+      </p:nvGrpSpPr>
+      <p:grpSpPr>
+        <a:xfrm>
+          <a:off x="0" y="0"/>
+          <a:ext cx="0" cy="0"/>
+          <a:chOff x="0" y="0"/>
+          <a:chExt cx="0" cy="0"/>
+        </a:xfrm>
+      </p:grpSpPr>
+      <p:sp>
+        <p:nvSpPr>
+          <p:cNvPr id="2" name="Slide Image Placeholder 1"/>
+          <p:cNvSpPr>
+            <a:spLocks noGrp="1" noRot="1" noChangeAspect="1"/>
+          </p:cNvSpPr>
+          <p:nvPr>
+            <p:ph type="sldImg"/>
+          </p:nvPr>
+        </p:nvSpPr>
+        <p:spPr/>
+      </p:sp>
+      <p:sp>
+        <p:nvSpPr>
+          <p:cNvPr id="3" name="Notes Placeholder 2"/>
+          <p:cNvSpPr>
+            <a:spLocks noGrp="1"/>
+          </p:cNvSpPr>
+          <p:nvPr>
+            <p:ph type="body" idx="1"/>
+          </p:nvPr>
+        </p:nvSpPr>
+        <p:spPr/>
+        <p:txBody>
+          <a:bodyPr/>
+          <a:lstStyle/>
+          <a:p>
+            <a:r>
+              <a:rPr lang="en-US" dirty="0"/>
+              <a:t/>
+            </a:r>
+            <a:endParaRPr lang="en-US" dirty="0"/>
+          </a:p>
+        </p:txBody>
+      </p:sp>
+      <p:sp>
+        <p:nvSpPr>
+          <p:cNvPr id="4" name="Slide Number Placeholder 3"/>
+          <p:cNvSpPr>
+            <a:spLocks noGrp="1"/>
+          </p:cNvSpPr>
+          <p:nvPr>
+            <p:ph type="sldNum" sz="quarter" idx="10"/>
+          </p:nvPr>
+        </p:nvSpPr>
+        <p:spPr/>
+        <p:txBody>
+          <a:bodyPr/>
+          <a:lstStyle/>
+          <a:p>
+            <a:fld id="{F7021451-1387-4CA6-816F-3879F97B5CBC}" type="slidenum">
+              <a:rPr lang="en-US"/>
+              <a:t>11</a:t>
+            </a:fld>
+            <a:endParaRPr lang="en-US"/>
+          </a:p>
+        </p:txBody>
+      </p:sp>
+    </p:spTree>
+    <p:extLst>
+      <p:ext uri="{BB962C8B-B14F-4D97-AF65-F5344CB8AC3E}">
+        <p14:creationId xmlns:p14="http://schemas.microsoft.com/office/powerpoint/2010/main" val="1024086991"/>
+      </p:ext>
+    </p:extLst>
+  </p:cSld>
+  <p:clrMapOvr>
+    <a:masterClrMapping/>
+  </p:clrMapOvr>
+</p:notes>
+</file>
+
+<file path=ppt/notesSlides/notesSlide12.xml><?xml version="1.0" encoding="utf-8"?>
+<p:notes xmlns:a="http://schemas.openxmlformats.org/drawingml/2006/main" xmlns:r="http://schemas.openxmlformats.org/officeDocument/2006/relationships" xmlns:p="http://schemas.openxmlformats.org/presentationml/2006/main">
+  <p:cSld>
+    <p:spTree>
+      <p:nvGrpSpPr>
+        <p:cNvPr id="1" name=""/>
+        <p:cNvGrpSpPr/>
+        <p:nvPr/>
+      </p:nvGrpSpPr>
+      <p:grpSpPr>
+        <a:xfrm>
+          <a:off x="0" y="0"/>
+          <a:ext cx="0" cy="0"/>
+          <a:chOff x="0" y="0"/>
+          <a:chExt cx="0" cy="0"/>
+        </a:xfrm>
+      </p:grpSpPr>
+      <p:sp>
+        <p:nvSpPr>
+          <p:cNvPr id="2" name="Slide Image Placeholder 1"/>
+          <p:cNvSpPr>
+            <a:spLocks noGrp="1" noRot="1" noChangeAspect="1"/>
+          </p:cNvSpPr>
+          <p:nvPr>
+            <p:ph type="sldImg"/>
+          </p:nvPr>
+        </p:nvSpPr>
+        <p:spPr/>
+      </p:sp>
+      <p:sp>
+        <p:nvSpPr>
+          <p:cNvPr id="3" name="Notes Placeholder 2"/>
+          <p:cNvSpPr>
+            <a:spLocks noGrp="1"/>
+          </p:cNvSpPr>
+          <p:nvPr>
+            <p:ph type="body" idx="1"/>
+          </p:nvPr>
+        </p:nvSpPr>
+        <p:spPr/>
+        <p:txBody>
+          <a:bodyPr/>
+          <a:lstStyle/>
+          <a:p>
+            <a:r>
+              <a:rPr lang="en-US" dirty="0"/>
+              <a:t/>
+            </a:r>
+            <a:endParaRPr lang="en-US" dirty="0"/>
+          </a:p>
+        </p:txBody>
+      </p:sp>
+      <p:sp>
+        <p:nvSpPr>
+          <p:cNvPr id="4" name="Slide Number Placeholder 3"/>
+          <p:cNvSpPr>
+            <a:spLocks noGrp="1"/>
+          </p:cNvSpPr>
+          <p:nvPr>
+            <p:ph type="sldNum" sz="quarter" idx="10"/>
+          </p:nvPr>
+        </p:nvSpPr>
+        <p:spPr/>
+        <p:txBody>
+          <a:bodyPr/>
+          <a:lstStyle/>
+          <a:p>
+            <a:fld id="{F7021451-1387-4CA6-816F-3879F97B5CBC}" type="slidenum">
+              <a:rPr lang="en-US"/>
+              <a:t>12</a:t>
             </a:fld>
             <a:endParaRPr lang="en-US"/>
           </a:p>
@@ -1869,6 +2047,1064 @@
     <p:bg>
       <p:bgPr>
         <a:solidFill>
+          <a:srgbClr val="FFFFFF"/>
+        </a:solidFill>
+      </p:bgPr>
+    </p:bg>
+    <p:spTree>
+      <p:nvGrpSpPr>
+        <p:cNvPr id="1" name=""/>
+        <p:cNvGrpSpPr/>
+        <p:nvPr/>
+      </p:nvGrpSpPr>
+      <p:grpSpPr>
+        <a:xfrm>
+          <a:off x="0" y="0"/>
+          <a:ext cx="0" cy="0"/>
+          <a:chOff x="0" y="0"/>
+          <a:chExt cx="0" cy="0"/>
+        </a:xfrm>
+      </p:grpSpPr>
+      <p:sp>
+        <p:nvSpPr>
+          <p:cNvPr id="2" name="Text 0"/>
+          <p:cNvSpPr/>
+          <p:nvPr/>
+        </p:nvSpPr>
+        <p:spPr>
+          <a:xfrm>
+            <a:off x="457200" y="365760"/>
+            <a:ext cx="8229600" cy="548640"/>
+          </a:xfrm>
+          <a:prstGeom prst="rect">
+            <a:avLst/>
+          </a:prstGeom>
+          <a:noFill/>
+          <a:ln/>
+        </p:spPr>
+        <p:txBody>
+          <a:bodyPr wrap="square" rtlCol="0" anchor="ctr"/>
+          <a:lstStyle/>
+          <a:p>
+            <a:pPr indent="0" marL="0">
+              <a:buNone/>
+            </a:pPr>
+            <a:r>
+              <a:rPr lang="en-US" sz="3200" b="1" dirty="0">
+                <a:solidFill>
+                  <a:srgbClr val="1A1A1A"/>
+                </a:solidFill>
+                <a:latin typeface="Arial" pitchFamily="34" charset="0"/>
+                <a:ea typeface="Arial" pitchFamily="34" charset="-122"/>
+                <a:cs typeface="Arial" pitchFamily="34" charset="-120"/>
+              </a:rPr>
+              <a:t>New Bicep Modules</a:t>
+            </a:r>
+            <a:endParaRPr lang="en-US" sz="3200" dirty="0"/>
+          </a:p>
+        </p:txBody>
+      </p:sp>
+      <p:sp>
+        <p:nvSpPr>
+          <p:cNvPr id="3" name="Text 1"/>
+          <p:cNvSpPr/>
+          <p:nvPr/>
+        </p:nvSpPr>
+        <p:spPr>
+          <a:xfrm>
+            <a:off x="457200" y="868680"/>
+            <a:ext cx="8229600" cy="274320"/>
+          </a:xfrm>
+          <a:prstGeom prst="rect">
+            <a:avLst/>
+          </a:prstGeom>
+          <a:noFill/>
+          <a:ln/>
+        </p:spPr>
+        <p:txBody>
+          <a:bodyPr wrap="square" rtlCol="0" anchor="ctr"/>
+          <a:lstStyle/>
+          <a:p>
+            <a:pPr indent="0" marL="0">
+              <a:buNone/>
+            </a:pPr>
+            <a:r>
+              <a:rPr lang="en-US" sz="1300" dirty="0">
+                <a:solidFill>
+                  <a:srgbClr val="666666"/>
+                </a:solidFill>
+                <a:latin typeface="Arial" pitchFamily="34" charset="0"/>
+                <a:ea typeface="Arial" pitchFamily="34" charset="-122"/>
+                <a:cs typeface="Arial" pitchFamily="34" charset="-120"/>
+              </a:rPr>
+              <a:t>Infrastructure as Code additions</a:t>
+            </a:r>
+            <a:endParaRPr lang="en-US" sz="1300" dirty="0"/>
+          </a:p>
+        </p:txBody>
+      </p:sp>
+      <p:sp>
+        <p:nvSpPr>
+          <p:cNvPr id="4" name="Shape 2"/>
+          <p:cNvSpPr/>
+          <p:nvPr/>
+        </p:nvSpPr>
+        <p:spPr>
+          <a:xfrm>
+            <a:off x="457200" y="1280160"/>
+            <a:ext cx="3931920" cy="2286000"/>
+          </a:xfrm>
+          <a:prstGeom prst="rect">
+            <a:avLst/>
+          </a:prstGeom>
+          <a:solidFill>
+            <a:srgbClr val="FFFFFF"/>
+          </a:solidFill>
+          <a:ln w="25400">
+            <a:solidFill>
+              <a:srgbClr val="1A1A1A"/>
+            </a:solidFill>
+            <a:prstDash val="solid"/>
+          </a:ln>
+        </p:spPr>
+      </p:sp>
+      <p:sp>
+        <p:nvSpPr>
+          <p:cNvPr id="5" name="Text 3"/>
+          <p:cNvSpPr/>
+          <p:nvPr/>
+        </p:nvSpPr>
+        <p:spPr>
+          <a:xfrm>
+            <a:off x="640080" y="1417320"/>
+            <a:ext cx="3657600" cy="365760"/>
+          </a:xfrm>
+          <a:prstGeom prst="rect">
+            <a:avLst/>
+          </a:prstGeom>
+          <a:noFill/>
+          <a:ln/>
+        </p:spPr>
+        <p:txBody>
+          <a:bodyPr wrap="square" rtlCol="0" anchor="ctr"/>
+          <a:lstStyle/>
+          <a:p>
+            <a:pPr indent="0" marL="0">
+              <a:buNone/>
+            </a:pPr>
+            <a:r>
+              <a:rPr lang="en-US" sz="1600" b="1" dirty="0">
+                <a:solidFill>
+                  <a:srgbClr val="1A1A1A"/>
+                </a:solidFill>
+                <a:latin typeface="Arial" pitchFamily="34" charset="0"/>
+                <a:ea typeface="Arial" pitchFamily="34" charset="-122"/>
+                <a:cs typeface="Arial" pitchFamily="34" charset="-120"/>
+              </a:rPr>
+              <a:t>Log Analytics Workspace</a:t>
+            </a:r>
+            <a:endParaRPr lang="en-US" sz="1600" dirty="0"/>
+          </a:p>
+        </p:txBody>
+      </p:sp>
+      <p:sp>
+        <p:nvSpPr>
+          <p:cNvPr id="6" name="Text 4"/>
+          <p:cNvSpPr/>
+          <p:nvPr/>
+        </p:nvSpPr>
+        <p:spPr>
+          <a:xfrm>
+            <a:off x="640080" y="1828800"/>
+            <a:ext cx="3566160" cy="1645920"/>
+          </a:xfrm>
+          <a:prstGeom prst="rect">
+            <a:avLst/>
+          </a:prstGeom>
+          <a:noFill/>
+          <a:ln/>
+        </p:spPr>
+        <p:txBody>
+          <a:bodyPr wrap="square" rtlCol="0" anchor="ctr"/>
+          <a:lstStyle/>
+          <a:p>
+            <a:pPr indent="0" marL="0">
+              <a:buNone/>
+            </a:pPr>
+            <a:r>
+              <a:rPr lang="en-US" sz="1100" b="1" dirty="0">
+                <a:solidFill>
+                  <a:srgbClr val="333333"/>
+                </a:solidFill>
+                <a:latin typeface="Arial" pitchFamily="34" charset="0"/>
+                <a:ea typeface="Arial" pitchFamily="34" charset="-122"/>
+                <a:cs typeface="Arial" pitchFamily="34" charset="-120"/>
+              </a:rPr>
+              <a:t>Purpose:</a:t>
+            </a:r>
+            <a:endParaRPr lang="en-US" sz="1100" dirty="0"/>
+          </a:p>
+          <a:p>
+            <a:pPr indent="0" marL="0">
+              <a:buNone/>
+            </a:pPr>
+            <a:r>
+              <a:rPr lang="en-US" sz="1100" dirty="0">
+                <a:solidFill>
+                  <a:srgbClr val="333333"/>
+                </a:solidFill>
+                <a:latin typeface="Arial" pitchFamily="34" charset="0"/>
+                <a:ea typeface="Arial" pitchFamily="34" charset="-122"/>
+                <a:cs typeface="Arial" pitchFamily="34" charset="-120"/>
+              </a:rPr>
+              <a:t>Centralized logging and monitoring
+</a:t>
+            </a:r>
+            <a:endParaRPr lang="en-US" sz="1100" dirty="0"/>
+          </a:p>
+          <a:p>
+            <a:pPr indent="0" marL="0">
+              <a:buNone/>
+            </a:pPr>
+            <a:r>
+              <a:rPr lang="en-US" sz="1100" b="1" dirty="0">
+                <a:solidFill>
+                  <a:srgbClr val="333333"/>
+                </a:solidFill>
+                <a:latin typeface="Arial" pitchFamily="34" charset="0"/>
+                <a:ea typeface="Arial" pitchFamily="34" charset="-122"/>
+                <a:cs typeface="Arial" pitchFamily="34" charset="-120"/>
+              </a:rPr>
+              <a:t>Features:</a:t>
+            </a:r>
+            <a:endParaRPr lang="en-US" sz="1100" dirty="0"/>
+          </a:p>
+          <a:p>
+            <a:pPr indent="0" marL="0">
+              <a:buNone/>
+            </a:pPr>
+            <a:r>
+              <a:rPr lang="en-US" sz="1100" dirty="0">
+                <a:solidFill>
+                  <a:srgbClr val="333333"/>
+                </a:solidFill>
+                <a:latin typeface="Arial" pitchFamily="34" charset="0"/>
+                <a:ea typeface="Arial" pitchFamily="34" charset="-122"/>
+                <a:cs typeface="Arial" pitchFamily="34" charset="-120"/>
+              </a:rPr>
+              <a:t>• Query-based log analysis</a:t>
+            </a:r>
+            <a:endParaRPr lang="en-US" sz="1100" dirty="0"/>
+          </a:p>
+          <a:p>
+            <a:pPr indent="0" marL="0">
+              <a:buNone/>
+            </a:pPr>
+            <a:r>
+              <a:rPr lang="en-US" sz="1100" dirty="0">
+                <a:solidFill>
+                  <a:srgbClr val="333333"/>
+                </a:solidFill>
+                <a:latin typeface="Arial" pitchFamily="34" charset="0"/>
+                <a:ea typeface="Arial" pitchFamily="34" charset="-122"/>
+                <a:cs typeface="Arial" pitchFamily="34" charset="-120"/>
+              </a:rPr>
+              <a:t>• Alerts and dashboards</a:t>
+            </a:r>
+            <a:endParaRPr lang="en-US" sz="1100" dirty="0"/>
+          </a:p>
+          <a:p>
+            <a:pPr indent="0" marL="0">
+              <a:buNone/>
+            </a:pPr>
+            <a:r>
+              <a:rPr lang="en-US" sz="1100" dirty="0">
+                <a:solidFill>
+                  <a:srgbClr val="333333"/>
+                </a:solidFill>
+                <a:latin typeface="Arial" pitchFamily="34" charset="0"/>
+                <a:ea typeface="Arial" pitchFamily="34" charset="-122"/>
+                <a:cs typeface="Arial" pitchFamily="34" charset="-120"/>
+              </a:rPr>
+              <a:t>• Integration with Azure Monitor</a:t>
+            </a:r>
+            <a:endParaRPr lang="en-US" sz="1100" dirty="0"/>
+          </a:p>
+        </p:txBody>
+      </p:sp>
+      <p:sp>
+        <p:nvSpPr>
+          <p:cNvPr id="7" name="Shape 5"/>
+          <p:cNvSpPr/>
+          <p:nvPr/>
+        </p:nvSpPr>
+        <p:spPr>
+          <a:xfrm>
+            <a:off x="4754880" y="1280160"/>
+            <a:ext cx="3931920" cy="2286000"/>
+          </a:xfrm>
+          <a:prstGeom prst="rect">
+            <a:avLst/>
+          </a:prstGeom>
+          <a:solidFill>
+            <a:srgbClr val="FFFFFF"/>
+          </a:solidFill>
+          <a:ln w="25400">
+            <a:solidFill>
+              <a:srgbClr val="1A1A1A"/>
+            </a:solidFill>
+            <a:prstDash val="solid"/>
+          </a:ln>
+        </p:spPr>
+      </p:sp>
+      <p:sp>
+        <p:nvSpPr>
+          <p:cNvPr id="8" name="Text 6"/>
+          <p:cNvSpPr/>
+          <p:nvPr/>
+        </p:nvSpPr>
+        <p:spPr>
+          <a:xfrm>
+            <a:off x="4937760" y="1417320"/>
+            <a:ext cx="3657600" cy="365760"/>
+          </a:xfrm>
+          <a:prstGeom prst="rect">
+            <a:avLst/>
+          </a:prstGeom>
+          <a:noFill/>
+          <a:ln/>
+        </p:spPr>
+        <p:txBody>
+          <a:bodyPr wrap="square" rtlCol="0" anchor="ctr"/>
+          <a:lstStyle/>
+          <a:p>
+            <a:pPr indent="0" marL="0">
+              <a:buNone/>
+            </a:pPr>
+            <a:r>
+              <a:rPr lang="en-US" sz="1600" b="1" dirty="0">
+                <a:solidFill>
+                  <a:srgbClr val="1A1A1A"/>
+                </a:solidFill>
+                <a:latin typeface="Arial" pitchFamily="34" charset="0"/>
+                <a:ea typeface="Arial" pitchFamily="34" charset="-122"/>
+                <a:cs typeface="Arial" pitchFamily="34" charset="-120"/>
+              </a:rPr>
+              <a:t>Application Insights</a:t>
+            </a:r>
+            <a:endParaRPr lang="en-US" sz="1600" dirty="0"/>
+          </a:p>
+        </p:txBody>
+      </p:sp>
+      <p:sp>
+        <p:nvSpPr>
+          <p:cNvPr id="9" name="Text 7"/>
+          <p:cNvSpPr/>
+          <p:nvPr/>
+        </p:nvSpPr>
+        <p:spPr>
+          <a:xfrm>
+            <a:off x="4937760" y="1828800"/>
+            <a:ext cx="3566160" cy="1645920"/>
+          </a:xfrm>
+          <a:prstGeom prst="rect">
+            <a:avLst/>
+          </a:prstGeom>
+          <a:noFill/>
+          <a:ln/>
+        </p:spPr>
+        <p:txBody>
+          <a:bodyPr wrap="square" rtlCol="0" anchor="ctr"/>
+          <a:lstStyle/>
+          <a:p>
+            <a:pPr indent="0" marL="0">
+              <a:buNone/>
+            </a:pPr>
+            <a:r>
+              <a:rPr lang="en-US" sz="1100" b="1" dirty="0">
+                <a:solidFill>
+                  <a:srgbClr val="333333"/>
+                </a:solidFill>
+                <a:latin typeface="Arial" pitchFamily="34" charset="0"/>
+                <a:ea typeface="Arial" pitchFamily="34" charset="-122"/>
+                <a:cs typeface="Arial" pitchFamily="34" charset="-120"/>
+              </a:rPr>
+              <a:t>Purpose:</a:t>
+            </a:r>
+            <a:endParaRPr lang="en-US" sz="1100" dirty="0"/>
+          </a:p>
+          <a:p>
+            <a:pPr indent="0" marL="0">
+              <a:buNone/>
+            </a:pPr>
+            <a:r>
+              <a:rPr lang="en-US" sz="1100" dirty="0">
+                <a:solidFill>
+                  <a:srgbClr val="333333"/>
+                </a:solidFill>
+                <a:latin typeface="Arial" pitchFamily="34" charset="0"/>
+                <a:ea typeface="Arial" pitchFamily="34" charset="-122"/>
+                <a:cs typeface="Arial" pitchFamily="34" charset="-120"/>
+              </a:rPr>
+              <a:t>Application performance monitoring
+</a:t>
+            </a:r>
+            <a:endParaRPr lang="en-US" sz="1100" dirty="0"/>
+          </a:p>
+          <a:p>
+            <a:pPr indent="0" marL="0">
+              <a:buNone/>
+            </a:pPr>
+            <a:r>
+              <a:rPr lang="en-US" sz="1100" b="1" dirty="0">
+                <a:solidFill>
+                  <a:srgbClr val="333333"/>
+                </a:solidFill>
+                <a:latin typeface="Arial" pitchFamily="34" charset="0"/>
+                <a:ea typeface="Arial" pitchFamily="34" charset="-122"/>
+                <a:cs typeface="Arial" pitchFamily="34" charset="-120"/>
+              </a:rPr>
+              <a:t>Features:</a:t>
+            </a:r>
+            <a:endParaRPr lang="en-US" sz="1100" dirty="0"/>
+          </a:p>
+          <a:p>
+            <a:pPr indent="0" marL="0">
+              <a:buNone/>
+            </a:pPr>
+            <a:r>
+              <a:rPr lang="en-US" sz="1100" dirty="0">
+                <a:solidFill>
+                  <a:srgbClr val="333333"/>
+                </a:solidFill>
+                <a:latin typeface="Arial" pitchFamily="34" charset="0"/>
+                <a:ea typeface="Arial" pitchFamily="34" charset="-122"/>
+                <a:cs typeface="Arial" pitchFamily="34" charset="-120"/>
+              </a:rPr>
+              <a:t>• Real-time performance metrics</a:t>
+            </a:r>
+            <a:endParaRPr lang="en-US" sz="1100" dirty="0"/>
+          </a:p>
+          <a:p>
+            <a:pPr indent="0" marL="0">
+              <a:buNone/>
+            </a:pPr>
+            <a:r>
+              <a:rPr lang="en-US" sz="1100" dirty="0">
+                <a:solidFill>
+                  <a:srgbClr val="333333"/>
+                </a:solidFill>
+                <a:latin typeface="Arial" pitchFamily="34" charset="0"/>
+                <a:ea typeface="Arial" pitchFamily="34" charset="-122"/>
+                <a:cs typeface="Arial" pitchFamily="34" charset="-120"/>
+              </a:rPr>
+              <a:t>• Exception tracking</a:t>
+            </a:r>
+            <a:endParaRPr lang="en-US" sz="1100" dirty="0"/>
+          </a:p>
+          <a:p>
+            <a:pPr indent="0" marL="0">
+              <a:buNone/>
+            </a:pPr>
+            <a:r>
+              <a:rPr lang="en-US" sz="1100" dirty="0">
+                <a:solidFill>
+                  <a:srgbClr val="333333"/>
+                </a:solidFill>
+                <a:latin typeface="Arial" pitchFamily="34" charset="0"/>
+                <a:ea typeface="Arial" pitchFamily="34" charset="-122"/>
+                <a:cs typeface="Arial" pitchFamily="34" charset="-120"/>
+              </a:rPr>
+              <a:t>• Dependency mapping</a:t>
+            </a:r>
+            <a:endParaRPr lang="en-US" sz="1100" dirty="0"/>
+          </a:p>
+        </p:txBody>
+      </p:sp>
+      <p:sp>
+        <p:nvSpPr>
+          <p:cNvPr id="10" name="Text 8"/>
+          <p:cNvSpPr/>
+          <p:nvPr/>
+        </p:nvSpPr>
+        <p:spPr>
+          <a:xfrm>
+            <a:off x="457200" y="3749040"/>
+            <a:ext cx="8229600" cy="365760"/>
+          </a:xfrm>
+          <a:prstGeom prst="rect">
+            <a:avLst/>
+          </a:prstGeom>
+          <a:noFill/>
+          <a:ln/>
+        </p:spPr>
+        <p:txBody>
+          <a:bodyPr wrap="square" rtlCol="0" anchor="ctr"/>
+          <a:lstStyle/>
+          <a:p>
+            <a:pPr algn="ctr" indent="0" marL="0">
+              <a:buNone/>
+            </a:pPr>
+            <a:r>
+              <a:rPr lang="en-US" sz="1300" i="1" dirty="0">
+                <a:solidFill>
+                  <a:srgbClr val="333333"/>
+                </a:solidFill>
+                <a:latin typeface="Arial" pitchFamily="34" charset="0"/>
+                <a:ea typeface="Arial" pitchFamily="34" charset="-122"/>
+                <a:cs typeface="Arial" pitchFamily="34" charset="-120"/>
+              </a:rPr>
+              <a:t>Combined these modules provide complete observability for BFF pattern deployments</a:t>
+            </a:r>
+            <a:endParaRPr lang="en-US" sz="1300" dirty="0"/>
+          </a:p>
+        </p:txBody>
+      </p:sp>
+    </p:spTree>
+  </p:cSld>
+  <p:clrMapOvr>
+    <a:masterClrMapping/>
+  </p:clrMapOvr>
+</p:sld>
+</file>
+
+<file path=ppt/slides/slide11.xml><?xml version="1.0" encoding="utf-8"?>
+<p:sld xmlns:a="http://schemas.openxmlformats.org/drawingml/2006/main" xmlns:r="http://schemas.openxmlformats.org/officeDocument/2006/relationships" xmlns:p="http://schemas.openxmlformats.org/presentationml/2006/main">
+  <p:cSld name="Slide 11">
+    <p:bg>
+      <p:bgPr>
+        <a:solidFill>
+          <a:srgbClr val="FFFFFF"/>
+        </a:solidFill>
+      </p:bgPr>
+    </p:bg>
+    <p:spTree>
+      <p:nvGrpSpPr>
+        <p:cNvPr id="1" name=""/>
+        <p:cNvGrpSpPr/>
+        <p:nvPr/>
+      </p:nvGrpSpPr>
+      <p:grpSpPr>
+        <a:xfrm>
+          <a:off x="0" y="0"/>
+          <a:ext cx="0" cy="0"/>
+          <a:chOff x="0" y="0"/>
+          <a:chExt cx="0" cy="0"/>
+        </a:xfrm>
+      </p:grpSpPr>
+      <p:sp>
+        <p:nvSpPr>
+          <p:cNvPr id="2" name="Text 0"/>
+          <p:cNvSpPr/>
+          <p:nvPr/>
+        </p:nvSpPr>
+        <p:spPr>
+          <a:xfrm>
+            <a:off x="457200" y="365760"/>
+            <a:ext cx="8229600" cy="548640"/>
+          </a:xfrm>
+          <a:prstGeom prst="rect">
+            <a:avLst/>
+          </a:prstGeom>
+          <a:noFill/>
+          <a:ln/>
+        </p:spPr>
+        <p:txBody>
+          <a:bodyPr wrap="square" rtlCol="0" anchor="ctr"/>
+          <a:lstStyle/>
+          <a:p>
+            <a:pPr indent="0" marL="0">
+              <a:buNone/>
+            </a:pPr>
+            <a:r>
+              <a:rPr lang="en-US" sz="3200" b="1" dirty="0">
+                <a:solidFill>
+                  <a:srgbClr val="1A1A1A"/>
+                </a:solidFill>
+                <a:latin typeface="Arial" pitchFamily="34" charset="0"/>
+                <a:ea typeface="Arial" pitchFamily="34" charset="-122"/>
+                <a:cs typeface="Arial" pitchFamily="34" charset="-120"/>
+              </a:rPr>
+              <a:t>Bug Fixes &amp; Maintenance</a:t>
+            </a:r>
+            <a:endParaRPr lang="en-US" sz="3200" dirty="0"/>
+          </a:p>
+        </p:txBody>
+      </p:sp>
+      <p:sp>
+        <p:nvSpPr>
+          <p:cNvPr id="3" name="Shape 1"/>
+          <p:cNvSpPr/>
+          <p:nvPr/>
+        </p:nvSpPr>
+        <p:spPr>
+          <a:xfrm>
+            <a:off x="457200" y="1005840"/>
+            <a:ext cx="3931920" cy="1554480"/>
+          </a:xfrm>
+          <a:prstGeom prst="rect">
+            <a:avLst/>
+          </a:prstGeom>
+          <a:solidFill>
+            <a:srgbClr val="E5E5E5"/>
+          </a:solidFill>
+          <a:ln/>
+        </p:spPr>
+      </p:sp>
+      <p:sp>
+        <p:nvSpPr>
+          <p:cNvPr id="4" name="Text 2"/>
+          <p:cNvSpPr/>
+          <p:nvPr/>
+        </p:nvSpPr>
+        <p:spPr>
+          <a:xfrm>
+            <a:off x="640080" y="1097280"/>
+            <a:ext cx="3657600" cy="320040"/>
+          </a:xfrm>
+          <a:prstGeom prst="rect">
+            <a:avLst/>
+          </a:prstGeom>
+          <a:noFill/>
+          <a:ln/>
+        </p:spPr>
+        <p:txBody>
+          <a:bodyPr wrap="square" rtlCol="0" anchor="ctr"/>
+          <a:lstStyle/>
+          <a:p>
+            <a:pPr indent="0" marL="0">
+              <a:buNone/>
+            </a:pPr>
+            <a:r>
+              <a:rPr lang="en-US" sz="1400" b="1" dirty="0">
+                <a:solidFill>
+                  <a:srgbClr val="1A1A1A"/>
+                </a:solidFill>
+                <a:latin typeface="Arial" pitchFamily="34" charset="0"/>
+                <a:ea typeface="Arial" pitchFamily="34" charset="-122"/>
+                <a:cs typeface="Arial" pitchFamily="34" charset="-120"/>
+              </a:rPr>
+              <a:t>Build Issues</a:t>
+            </a:r>
+            <a:endParaRPr lang="en-US" sz="1400" dirty="0"/>
+          </a:p>
+        </p:txBody>
+      </p:sp>
+      <p:sp>
+        <p:nvSpPr>
+          <p:cNvPr id="5" name="Text 3"/>
+          <p:cNvSpPr/>
+          <p:nvPr/>
+        </p:nvSpPr>
+        <p:spPr>
+          <a:xfrm>
+            <a:off x="731520" y="1463040"/>
+            <a:ext cx="3474720" cy="1005840"/>
+          </a:xfrm>
+          <a:prstGeom prst="rect">
+            <a:avLst/>
+          </a:prstGeom>
+          <a:noFill/>
+          <a:ln/>
+        </p:spPr>
+        <p:txBody>
+          <a:bodyPr wrap="square" rtlCol="0" anchor="ctr"/>
+          <a:lstStyle/>
+          <a:p>
+            <a:pPr indent="0" marL="0">
+              <a:buNone/>
+            </a:pPr>
+            <a:r>
+              <a:rPr lang="en-US" sz="1200" dirty="0">
+                <a:solidFill>
+                  <a:srgbClr val="333333"/>
+                </a:solidFill>
+                <a:latin typeface="Arial" pitchFamily="34" charset="0"/>
+                <a:ea typeface="Arial" pitchFamily="34" charset="-122"/>
+                <a:cs typeface="Arial" pitchFamily="34" charset="-120"/>
+              </a:rPr>
+              <a:t>✓ Resolved compilation errors</a:t>
+            </a:r>
+            <a:endParaRPr lang="en-US" sz="1200" dirty="0"/>
+          </a:p>
+          <a:p>
+            <a:pPr indent="0" marL="0">
+              <a:buNone/>
+            </a:pPr>
+            <a:r>
+              <a:rPr lang="en-US" sz="1200" dirty="0">
+                <a:solidFill>
+                  <a:srgbClr val="333333"/>
+                </a:solidFill>
+                <a:latin typeface="Arial" pitchFamily="34" charset="0"/>
+                <a:ea typeface="Arial" pitchFamily="34" charset="-122"/>
+                <a:cs typeface="Arial" pitchFamily="34" charset="-120"/>
+              </a:rPr>
+              <a:t>✓ Fixed dependency conflicts</a:t>
+            </a:r>
+            <a:endParaRPr lang="en-US" sz="1200" dirty="0"/>
+          </a:p>
+        </p:txBody>
+      </p:sp>
+      <p:sp>
+        <p:nvSpPr>
+          <p:cNvPr id="6" name="Shape 4"/>
+          <p:cNvSpPr/>
+          <p:nvPr/>
+        </p:nvSpPr>
+        <p:spPr>
+          <a:xfrm>
+            <a:off x="4754880" y="1005840"/>
+            <a:ext cx="3931920" cy="1554480"/>
+          </a:xfrm>
+          <a:prstGeom prst="rect">
+            <a:avLst/>
+          </a:prstGeom>
+          <a:solidFill>
+            <a:srgbClr val="E5E5E5"/>
+          </a:solidFill>
+          <a:ln/>
+        </p:spPr>
+      </p:sp>
+      <p:sp>
+        <p:nvSpPr>
+          <p:cNvPr id="7" name="Text 5"/>
+          <p:cNvSpPr/>
+          <p:nvPr/>
+        </p:nvSpPr>
+        <p:spPr>
+          <a:xfrm>
+            <a:off x="4937760" y="1097280"/>
+            <a:ext cx="3657600" cy="320040"/>
+          </a:xfrm>
+          <a:prstGeom prst="rect">
+            <a:avLst/>
+          </a:prstGeom>
+          <a:noFill/>
+          <a:ln/>
+        </p:spPr>
+        <p:txBody>
+          <a:bodyPr wrap="square" rtlCol="0" anchor="ctr"/>
+          <a:lstStyle/>
+          <a:p>
+            <a:pPr indent="0" marL="0">
+              <a:buNone/>
+            </a:pPr>
+            <a:r>
+              <a:rPr lang="en-US" sz="1400" b="1" dirty="0">
+                <a:solidFill>
+                  <a:srgbClr val="1A1A1A"/>
+                </a:solidFill>
+                <a:latin typeface="Arial" pitchFamily="34" charset="0"/>
+                <a:ea typeface="Arial" pitchFamily="34" charset="-122"/>
+                <a:cs typeface="Arial" pitchFamily="34" charset="-120"/>
+              </a:rPr>
+              <a:t>App Service</a:t>
+            </a:r>
+            <a:endParaRPr lang="en-US" sz="1400" dirty="0"/>
+          </a:p>
+        </p:txBody>
+      </p:sp>
+      <p:sp>
+        <p:nvSpPr>
+          <p:cNvPr id="8" name="Text 6"/>
+          <p:cNvSpPr/>
+          <p:nvPr/>
+        </p:nvSpPr>
+        <p:spPr>
+          <a:xfrm>
+            <a:off x="5029200" y="1463040"/>
+            <a:ext cx="3474720" cy="1005840"/>
+          </a:xfrm>
+          <a:prstGeom prst="rect">
+            <a:avLst/>
+          </a:prstGeom>
+          <a:noFill/>
+          <a:ln/>
+        </p:spPr>
+        <p:txBody>
+          <a:bodyPr wrap="square" rtlCol="0" anchor="ctr"/>
+          <a:lstStyle/>
+          <a:p>
+            <a:pPr indent="0" marL="0">
+              <a:buNone/>
+            </a:pPr>
+            <a:r>
+              <a:rPr lang="en-US" sz="1200" dirty="0">
+                <a:solidFill>
+                  <a:srgbClr val="333333"/>
+                </a:solidFill>
+                <a:latin typeface="Arial" pitchFamily="34" charset="0"/>
+                <a:ea typeface="Arial" pitchFamily="34" charset="-122"/>
+                <a:cs typeface="Arial" pitchFamily="34" charset="-120"/>
+              </a:rPr>
+              <a:t>✓ Removal troubleshooting resolved</a:t>
+            </a:r>
+            <a:endParaRPr lang="en-US" sz="1200" dirty="0"/>
+          </a:p>
+          <a:p>
+            <a:pPr indent="0" marL="0">
+              <a:buNone/>
+            </a:pPr>
+            <a:r>
+              <a:rPr lang="en-US" sz="1200" dirty="0">
+                <a:solidFill>
+                  <a:srgbClr val="333333"/>
+                </a:solidFill>
+                <a:latin typeface="Arial" pitchFamily="34" charset="0"/>
+                <a:ea typeface="Arial" pitchFamily="34" charset="-122"/>
+                <a:cs typeface="Arial" pitchFamily="34" charset="-120"/>
+              </a:rPr>
+              <a:t>✓ Cleanup process improved</a:t>
+            </a:r>
+            <a:endParaRPr lang="en-US" sz="1200" dirty="0"/>
+          </a:p>
+        </p:txBody>
+      </p:sp>
+      <p:sp>
+        <p:nvSpPr>
+          <p:cNvPr id="9" name="Shape 7"/>
+          <p:cNvSpPr/>
+          <p:nvPr/>
+        </p:nvSpPr>
+        <p:spPr>
+          <a:xfrm>
+            <a:off x="457200" y="2743200"/>
+            <a:ext cx="3931920" cy="1554480"/>
+          </a:xfrm>
+          <a:prstGeom prst="rect">
+            <a:avLst/>
+          </a:prstGeom>
+          <a:solidFill>
+            <a:srgbClr val="E5E5E5"/>
+          </a:solidFill>
+          <a:ln/>
+        </p:spPr>
+      </p:sp>
+      <p:sp>
+        <p:nvSpPr>
+          <p:cNvPr id="10" name="Text 8"/>
+          <p:cNvSpPr/>
+          <p:nvPr/>
+        </p:nvSpPr>
+        <p:spPr>
+          <a:xfrm>
+            <a:off x="640080" y="2834640"/>
+            <a:ext cx="3657600" cy="320040"/>
+          </a:xfrm>
+          <a:prstGeom prst="rect">
+            <a:avLst/>
+          </a:prstGeom>
+          <a:noFill/>
+          <a:ln/>
+        </p:spPr>
+        <p:txBody>
+          <a:bodyPr wrap="square" rtlCol="0" anchor="ctr"/>
+          <a:lstStyle/>
+          <a:p>
+            <a:pPr indent="0" marL="0">
+              <a:buNone/>
+            </a:pPr>
+            <a:r>
+              <a:rPr lang="en-US" sz="1400" b="1" dirty="0">
+                <a:solidFill>
+                  <a:srgbClr val="1A1A1A"/>
+                </a:solidFill>
+                <a:latin typeface="Arial" pitchFamily="34" charset="0"/>
+                <a:ea typeface="Arial" pitchFamily="34" charset="-122"/>
+                <a:cs typeface="Arial" pitchFamily="34" charset="-120"/>
+              </a:rPr>
+              <a:t>CI/CD Pipeline</a:t>
+            </a:r>
+            <a:endParaRPr lang="en-US" sz="1400" dirty="0"/>
+          </a:p>
+        </p:txBody>
+      </p:sp>
+      <p:sp>
+        <p:nvSpPr>
+          <p:cNvPr id="11" name="Text 9"/>
+          <p:cNvSpPr/>
+          <p:nvPr/>
+        </p:nvSpPr>
+        <p:spPr>
+          <a:xfrm>
+            <a:off x="731520" y="3200400"/>
+            <a:ext cx="3474720" cy="1005840"/>
+          </a:xfrm>
+          <a:prstGeom prst="rect">
+            <a:avLst/>
+          </a:prstGeom>
+          <a:noFill/>
+          <a:ln/>
+        </p:spPr>
+        <p:txBody>
+          <a:bodyPr wrap="square" rtlCol="0" anchor="ctr"/>
+          <a:lstStyle/>
+          <a:p>
+            <a:pPr indent="0" marL="0">
+              <a:buNone/>
+            </a:pPr>
+            <a:r>
+              <a:rPr lang="en-US" sz="1200" dirty="0">
+                <a:solidFill>
+                  <a:srgbClr val="333333"/>
+                </a:solidFill>
+                <a:latin typeface="Arial" pitchFamily="34" charset="0"/>
+                <a:ea typeface="Arial" pitchFamily="34" charset="-122"/>
+                <a:cs typeface="Arial" pitchFamily="34" charset="-120"/>
+              </a:rPr>
+              <a:t>✓ Pipeline issues fixed</a:t>
+            </a:r>
+            <a:endParaRPr lang="en-US" sz="1200" dirty="0"/>
+          </a:p>
+          <a:p>
+            <a:pPr indent="0" marL="0">
+              <a:buNone/>
+            </a:pPr>
+            <a:r>
+              <a:rPr lang="en-US" sz="1200" dirty="0">
+                <a:solidFill>
+                  <a:srgbClr val="333333"/>
+                </a:solidFill>
+                <a:latin typeface="Arial" pitchFamily="34" charset="0"/>
+                <a:ea typeface="Arial" pitchFamily="34" charset="-122"/>
+                <a:cs typeface="Arial" pitchFamily="34" charset="-120"/>
+              </a:rPr>
+              <a:t>✓ Deployment reliability improved</a:t>
+            </a:r>
+            <a:endParaRPr lang="en-US" sz="1200" dirty="0"/>
+          </a:p>
+        </p:txBody>
+      </p:sp>
+      <p:sp>
+        <p:nvSpPr>
+          <p:cNvPr id="12" name="Shape 10"/>
+          <p:cNvSpPr/>
+          <p:nvPr/>
+        </p:nvSpPr>
+        <p:spPr>
+          <a:xfrm>
+            <a:off x="4754880" y="2743200"/>
+            <a:ext cx="3931920" cy="1554480"/>
+          </a:xfrm>
+          <a:prstGeom prst="rect">
+            <a:avLst/>
+          </a:prstGeom>
+          <a:solidFill>
+            <a:srgbClr val="E5E5E5"/>
+          </a:solidFill>
+          <a:ln/>
+        </p:spPr>
+      </p:sp>
+      <p:sp>
+        <p:nvSpPr>
+          <p:cNvPr id="13" name="Text 11"/>
+          <p:cNvSpPr/>
+          <p:nvPr/>
+        </p:nvSpPr>
+        <p:spPr>
+          <a:xfrm>
+            <a:off x="4937760" y="2834640"/>
+            <a:ext cx="3657600" cy="320040"/>
+          </a:xfrm>
+          <a:prstGeom prst="rect">
+            <a:avLst/>
+          </a:prstGeom>
+          <a:noFill/>
+          <a:ln/>
+        </p:spPr>
+        <p:txBody>
+          <a:bodyPr wrap="square" rtlCol="0" anchor="ctr"/>
+          <a:lstStyle/>
+          <a:p>
+            <a:pPr indent="0" marL="0">
+              <a:buNone/>
+            </a:pPr>
+            <a:r>
+              <a:rPr lang="en-US" sz="1400" b="1" dirty="0">
+                <a:solidFill>
+                  <a:srgbClr val="1A1A1A"/>
+                </a:solidFill>
+                <a:latin typeface="Arial" pitchFamily="34" charset="0"/>
+                <a:ea typeface="Arial" pitchFamily="34" charset="-122"/>
+                <a:cs typeface="Arial" pitchFamily="34" charset="-120"/>
+              </a:rPr>
+              <a:t>Infrastructure</a:t>
+            </a:r>
+            <a:endParaRPr lang="en-US" sz="1400" dirty="0"/>
+          </a:p>
+        </p:txBody>
+      </p:sp>
+      <p:sp>
+        <p:nvSpPr>
+          <p:cNvPr id="14" name="Text 12"/>
+          <p:cNvSpPr/>
+          <p:nvPr/>
+        </p:nvSpPr>
+        <p:spPr>
+          <a:xfrm>
+            <a:off x="5029200" y="3200400"/>
+            <a:ext cx="3474720" cy="1005840"/>
+          </a:xfrm>
+          <a:prstGeom prst="rect">
+            <a:avLst/>
+          </a:prstGeom>
+          <a:noFill/>
+          <a:ln/>
+        </p:spPr>
+        <p:txBody>
+          <a:bodyPr wrap="square" rtlCol="0" anchor="ctr"/>
+          <a:lstStyle/>
+          <a:p>
+            <a:pPr indent="0" marL="0">
+              <a:buNone/>
+            </a:pPr>
+            <a:r>
+              <a:rPr lang="en-US" sz="1200" dirty="0">
+                <a:solidFill>
+                  <a:srgbClr val="333333"/>
+                </a:solidFill>
+                <a:latin typeface="Arial" pitchFamily="34" charset="0"/>
+                <a:ea typeface="Arial" pitchFamily="34" charset="-122"/>
+                <a:cs typeface="Arial" pitchFamily="34" charset="-120"/>
+              </a:rPr>
+              <a:t>✓ Consolidation for BFF patterns</a:t>
+            </a:r>
+            <a:endParaRPr lang="en-US" sz="1200" dirty="0"/>
+          </a:p>
+          <a:p>
+            <a:pPr indent="0" marL="0">
+              <a:buNone/>
+            </a:pPr>
+            <a:r>
+              <a:rPr lang="en-US" sz="1200" dirty="0">
+                <a:solidFill>
+                  <a:srgbClr val="333333"/>
+                </a:solidFill>
+                <a:latin typeface="Arial" pitchFamily="34" charset="0"/>
+                <a:ea typeface="Arial" pitchFamily="34" charset="-122"/>
+                <a:cs typeface="Arial" pitchFamily="34" charset="-120"/>
+              </a:rPr>
+              <a:t>✓ Policy compliance updates</a:t>
+            </a:r>
+            <a:endParaRPr lang="en-US" sz="1200" dirty="0"/>
+          </a:p>
+        </p:txBody>
+      </p:sp>
+    </p:spTree>
+  </p:cSld>
+  <p:clrMapOvr>
+    <a:masterClrMapping/>
+  </p:clrMapOvr>
+</p:sld>
+</file>
+
+<file path=ppt/slides/slide12.xml><?xml version="1.0" encoding="utf-8"?>
+<p:sld xmlns:a="http://schemas.openxmlformats.org/drawingml/2006/main" xmlns:r="http://schemas.openxmlformats.org/officeDocument/2006/relationships" xmlns:p="http://schemas.openxmlformats.org/presentationml/2006/main">
+  <p:cSld name="Slide 12">
+    <p:bg>
+      <p:bgPr>
+        <a:solidFill>
           <a:srgbClr val="1A1A1A"/>
         </a:solidFill>
       </p:bgPr>
@@ -2307,7 +3543,7 @@
                 <a:ea typeface="Arial" pitchFamily="34" charset="-122"/>
                 <a:cs typeface="Arial" pitchFamily="34" charset="-120"/>
               </a:rPr>
-              <a:t>5.  LANXY Infrastructure</a:t>
+              <a:t>5.  What is LANXY?</a:t>
             </a:r>
             <a:endParaRPr lang="en-US" sz="1800" dirty="0"/>
           </a:p>
@@ -2327,7 +3563,7 @@
                 <a:ea typeface="Arial" pitchFamily="34" charset="-122"/>
                 <a:cs typeface="Arial" pitchFamily="34" charset="-120"/>
               </a:rPr>
-              <a:t>6.  New Bicep Modules</a:t>
+              <a:t>6.  What is ChatOps?</a:t>
             </a:r>
             <a:endParaRPr lang="en-US" sz="1800" dirty="0"/>
           </a:p>
@@ -2347,7 +3583,7 @@
                 <a:ea typeface="Arial" pitchFamily="34" charset="-122"/>
                 <a:cs typeface="Arial" pitchFamily="34" charset="-120"/>
               </a:rPr>
-              <a:t>7.  Bug Fixes &amp; Maintenance</a:t>
+              <a:t>7.  LANXY Infrastructure Updates</a:t>
             </a:r>
             <a:endParaRPr lang="en-US" sz="1800" dirty="0"/>
           </a:p>
@@ -2367,7 +3603,47 @@
                 <a:ea typeface="Arial" pitchFamily="34" charset="-122"/>
                 <a:cs typeface="Arial" pitchFamily="34" charset="-120"/>
               </a:rPr>
-              <a:t>8.  Summary &amp; Questions</a:t>
+              <a:t>8.  New Bicep Modules</a:t>
+            </a:r>
+            <a:endParaRPr lang="en-US" sz="1800" dirty="0"/>
+          </a:p>
+          <a:p>
+            <a:pPr indent="0" marL="0">
+              <a:spcAft>
+                <a:spcPts val="1400"/>
+              </a:spcAft>
+              <a:buNone/>
+            </a:pPr>
+            <a:r>
+              <a:rPr lang="en-US" sz="1800" dirty="0">
+                <a:solidFill>
+                  <a:srgbClr val="333333"/>
+                </a:solidFill>
+                <a:latin typeface="Arial" pitchFamily="34" charset="0"/>
+                <a:ea typeface="Arial" pitchFamily="34" charset="-122"/>
+                <a:cs typeface="Arial" pitchFamily="34" charset="-120"/>
+              </a:rPr>
+              <a:t>9.  Bug Fixes &amp; Maintenance</a:t>
+            </a:r>
+            <a:endParaRPr lang="en-US" sz="1800" dirty="0"/>
+          </a:p>
+          <a:p>
+            <a:pPr indent="0" marL="0">
+              <a:spcAft>
+                <a:spcPts val="1400"/>
+              </a:spcAft>
+              <a:buNone/>
+            </a:pPr>
+            <a:r>
+              <a:rPr lang="en-US" sz="1800" dirty="0">
+                <a:solidFill>
+                  <a:srgbClr val="333333"/>
+                </a:solidFill>
+                <a:latin typeface="Arial" pitchFamily="34" charset="0"/>
+                <a:ea typeface="Arial" pitchFamily="34" charset="-122"/>
+                <a:cs typeface="Arial" pitchFamily="34" charset="-120"/>
+              </a:rPr>
+              <a:t>10.  Summary &amp; Questions</a:t>
             </a:r>
             <a:endParaRPr lang="en-US" sz="1800" dirty="0"/>
           </a:p>
@@ -4842,7 +6118,7 @@
                 <a:ea typeface="Arial" pitchFamily="34" charset="-122"/>
                 <a:cs typeface="Arial" pitchFamily="34" charset="-120"/>
               </a:rPr>
-              <a:t>LANXY Infrastructure</a:t>
+              <a:t>What is LANXY?</a:t>
             </a:r>
             <a:endParaRPr lang="en-US" sz="3200" dirty="0"/>
           </a:p>
@@ -4873,7 +6149,7 @@
               <a:buNone/>
             </a:pPr>
             <a:r>
-              <a:rPr lang="en-US" sz="1300" dirty="0">
+              <a:rPr lang="en-US" sz="1400" dirty="0">
                 <a:solidFill>
                   <a:srgbClr val="666666"/>
                 </a:solidFill>
@@ -4881,9 +6157,9 @@
                 <a:ea typeface="Arial" pitchFamily="34" charset="-122"/>
                 <a:cs typeface="Arial" pitchFamily="34" charset="-120"/>
               </a:rPr>
-              <a:t>Reverse proxy solution for CORS handling</a:t>
-            </a:r>
-            <a:endParaRPr lang="en-US" sz="1300" dirty="0"/>
+              <a:t>Reverse Proxy Solution for Development Teams</a:t>
+            </a:r>
+            <a:endParaRPr lang="en-US" sz="1400" dirty="0"/>
           </a:p>
         </p:txBody>
       </p:sp>
@@ -4896,7 +6172,7 @@
         <p:spPr>
           <a:xfrm>
             <a:off x="457200" y="1280160"/>
-            <a:ext cx="3931920" cy="2011680"/>
+            <a:ext cx="3931920" cy="1645920"/>
           </a:xfrm>
           <a:prstGeom prst="rect">
             <a:avLst/>
@@ -4940,7 +6216,7 @@
                 <a:ea typeface="Arial" pitchFamily="34" charset="-122"/>
                 <a:cs typeface="Arial" pitchFamily="34" charset="-120"/>
               </a:rPr>
-              <a:t>Infrastructure &amp; Config</a:t>
+              <a:t>The Problem</a:t>
             </a:r>
             <a:endParaRPr lang="en-US" sz="1400" dirty="0"/>
           </a:p>
@@ -4954,8 +6230,8 @@
         </p:nvSpPr>
         <p:spPr>
           <a:xfrm>
-            <a:off x="822960" y="1737360"/>
-            <a:ext cx="3383280" cy="1371600"/>
+            <a:off x="640080" y="1737360"/>
+            <a:ext cx="3566160" cy="1097280"/>
           </a:xfrm>
           <a:prstGeom prst="rect">
             <a:avLst/>
@@ -4979,7 +6255,7 @@
                 <a:ea typeface="Arial" pitchFamily="34" charset="-122"/>
                 <a:cs typeface="Arial" pitchFamily="34" charset="-120"/>
               </a:rPr>
-              <a:t>• Move HA default VM (2079 → 2078)</a:t>
+              <a:t>• CORS errors when connecting to</a:t>
             </a:r>
             <a:endParaRPr lang="en-US" sz="1200" dirty="0"/>
           </a:p>
@@ -4996,7 +6272,7 @@
                 <a:ea typeface="Arial" pitchFamily="34" charset="-122"/>
                 <a:cs typeface="Arial" pitchFamily="34" charset="-120"/>
               </a:rPr>
-              <a:t>• Outbound config for wsi02</a:t>
+              <a:t>  multiple backend services</a:t>
             </a:r>
             <a:endParaRPr lang="en-US" sz="1200" dirty="0"/>
           </a:p>
@@ -5013,10 +6289,27 @@
                 <a:ea typeface="Arial" pitchFamily="34" charset="-122"/>
                 <a:cs typeface="Arial" pitchFamily="34" charset="-120"/>
               </a:rPr>
-              <a:t>• Schedule adjustment for morning startup</a:t>
+              <a:t>• Complex proxy configurations</a:t>
             </a:r>
             <a:endParaRPr lang="en-US" sz="1200" dirty="0"/>
           </a:p>
+          <a:p>
+            <a:pPr indent="0" marL="0">
+              <a:buNone/>
+            </a:pPr>
+            <a:r>
+              <a:rPr lang="en-US" sz="1200" dirty="0">
+                <a:solidFill>
+                  <a:srgbClr val="333333"/>
+                </a:solidFill>
+                <a:latin typeface="Arial" pitchFamily="34" charset="0"/>
+                <a:ea typeface="Arial" pitchFamily="34" charset="-122"/>
+                <a:cs typeface="Arial" pitchFamily="34" charset="-120"/>
+              </a:rPr>
+              <a:t>• Inconsistent dev environments</a:t>
+            </a:r>
+            <a:endParaRPr lang="en-US" sz="1200" dirty="0"/>
+          </a:p>
         </p:txBody>
       </p:sp>
       <p:sp>
@@ -5028,7 +6321,195 @@
         <p:spPr>
           <a:xfrm>
             <a:off x="4754880" y="1280160"/>
-            <a:ext cx="3931920" cy="2011680"/>
+            <a:ext cx="3931920" cy="1645920"/>
+          </a:xfrm>
+          <a:prstGeom prst="rect">
+            <a:avLst/>
+          </a:prstGeom>
+          <a:solidFill>
+            <a:srgbClr val="1A1A1A"/>
+          </a:solidFill>
+          <a:ln/>
+        </p:spPr>
+      </p:sp>
+      <p:sp>
+        <p:nvSpPr>
+          <p:cNvPr id="8" name="Text 6"/>
+          <p:cNvSpPr/>
+          <p:nvPr/>
+        </p:nvSpPr>
+        <p:spPr>
+          <a:xfrm>
+            <a:off x="4937760" y="1371600"/>
+            <a:ext cx="3657600" cy="320040"/>
+          </a:xfrm>
+          <a:prstGeom prst="rect">
+            <a:avLst/>
+          </a:prstGeom>
+          <a:noFill/>
+          <a:ln/>
+        </p:spPr>
+        <p:txBody>
+          <a:bodyPr wrap="square" rtlCol="0" anchor="ctr"/>
+          <a:lstStyle/>
+          <a:p>
+            <a:pPr indent="0" marL="0">
+              <a:buNone/>
+            </a:pPr>
+            <a:r>
+              <a:rPr lang="en-US" sz="1400" b="1" dirty="0">
+                <a:solidFill>
+                  <a:srgbClr val="FFFFFF"/>
+                </a:solidFill>
+                <a:latin typeface="Arial" pitchFamily="34" charset="0"/>
+                <a:ea typeface="Arial" pitchFamily="34" charset="-122"/>
+                <a:cs typeface="Arial" pitchFamily="34" charset="-120"/>
+              </a:rPr>
+              <a:t>LANXY Solution</a:t>
+            </a:r>
+            <a:endParaRPr lang="en-US" sz="1400" dirty="0"/>
+          </a:p>
+        </p:txBody>
+      </p:sp>
+      <p:sp>
+        <p:nvSpPr>
+          <p:cNvPr id="9" name="Text 7"/>
+          <p:cNvSpPr/>
+          <p:nvPr/>
+        </p:nvSpPr>
+        <p:spPr>
+          <a:xfrm>
+            <a:off x="4937760" y="1737360"/>
+            <a:ext cx="3566160" cy="1097280"/>
+          </a:xfrm>
+          <a:prstGeom prst="rect">
+            <a:avLst/>
+          </a:prstGeom>
+          <a:noFill/>
+          <a:ln/>
+        </p:spPr>
+        <p:txBody>
+          <a:bodyPr wrap="square" rtlCol="0" anchor="ctr"/>
+          <a:lstStyle/>
+          <a:p>
+            <a:pPr indent="0" marL="0">
+              <a:buNone/>
+            </a:pPr>
+            <a:r>
+              <a:rPr lang="en-US" sz="1200" dirty="0">
+                <a:solidFill>
+                  <a:srgbClr val="E5E5E5"/>
+                </a:solidFill>
+                <a:latin typeface="Arial" pitchFamily="34" charset="0"/>
+                <a:ea typeface="Arial" pitchFamily="34" charset="-122"/>
+                <a:cs typeface="Arial" pitchFamily="34" charset="-120"/>
+              </a:rPr>
+              <a:t>• All services behind one domain</a:t>
+            </a:r>
+            <a:endParaRPr lang="en-US" sz="1200" dirty="0"/>
+          </a:p>
+          <a:p>
+            <a:pPr indent="0" marL="0">
+              <a:buNone/>
+            </a:pPr>
+            <a:r>
+              <a:rPr lang="en-US" sz="1200" dirty="0">
+                <a:solidFill>
+                  <a:srgbClr val="E5E5E5"/>
+                </a:solidFill>
+                <a:latin typeface="Arial" pitchFamily="34" charset="0"/>
+                <a:ea typeface="Arial" pitchFamily="34" charset="-122"/>
+                <a:cs typeface="Arial" pitchFamily="34" charset="-120"/>
+              </a:rPr>
+              <a:t>• No more CORS issues</a:t>
+            </a:r>
+            <a:endParaRPr lang="en-US" sz="1200" dirty="0"/>
+          </a:p>
+          <a:p>
+            <a:pPr indent="0" marL="0">
+              <a:buNone/>
+            </a:pPr>
+            <a:r>
+              <a:rPr lang="en-US" sz="1200" dirty="0">
+                <a:solidFill>
+                  <a:srgbClr val="E5E5E5"/>
+                </a:solidFill>
+                <a:latin typeface="Arial" pitchFamily="34" charset="0"/>
+                <a:ea typeface="Arial" pitchFamily="34" charset="-122"/>
+                <a:cs typeface="Arial" pitchFamily="34" charset="-120"/>
+              </a:rPr>
+              <a:t>• Pre-configured standard routes</a:t>
+            </a:r>
+            <a:endParaRPr lang="en-US" sz="1200" dirty="0"/>
+          </a:p>
+          <a:p>
+            <a:pPr indent="0" marL="0">
+              <a:buNone/>
+            </a:pPr>
+            <a:r>
+              <a:rPr lang="en-US" sz="1200" dirty="0">
+                <a:solidFill>
+                  <a:srgbClr val="E5E5E5"/>
+                </a:solidFill>
+                <a:latin typeface="Arial" pitchFamily="34" charset="0"/>
+                <a:ea typeface="Arial" pitchFamily="34" charset="-122"/>
+                <a:cs typeface="Arial" pitchFamily="34" charset="-120"/>
+              </a:rPr>
+              <a:t>• Dev &amp; Test environments ready</a:t>
+            </a:r>
+            <a:endParaRPr lang="en-US" sz="1200" dirty="0"/>
+          </a:p>
+        </p:txBody>
+      </p:sp>
+      <p:sp>
+        <p:nvSpPr>
+          <p:cNvPr id="10" name="Text 8"/>
+          <p:cNvSpPr/>
+          <p:nvPr/>
+        </p:nvSpPr>
+        <p:spPr>
+          <a:xfrm>
+            <a:off x="457200" y="3108960"/>
+            <a:ext cx="8229600" cy="320040"/>
+          </a:xfrm>
+          <a:prstGeom prst="rect">
+            <a:avLst/>
+          </a:prstGeom>
+          <a:noFill/>
+          <a:ln/>
+        </p:spPr>
+        <p:txBody>
+          <a:bodyPr wrap="square" rtlCol="0" anchor="ctr"/>
+          <a:lstStyle/>
+          <a:p>
+            <a:pPr indent="0" marL="0">
+              <a:buNone/>
+            </a:pPr>
+            <a:r>
+              <a:rPr lang="en-US" sz="1400" b="1" dirty="0">
+                <a:solidFill>
+                  <a:srgbClr val="1A1A1A"/>
+                </a:solidFill>
+                <a:latin typeface="Arial" pitchFamily="34" charset="0"/>
+                <a:ea typeface="Arial" pitchFamily="34" charset="-122"/>
+                <a:cs typeface="Arial" pitchFamily="34" charset="-120"/>
+              </a:rPr>
+              <a:t>How It Works</a:t>
+            </a:r>
+            <a:endParaRPr lang="en-US" sz="1400" dirty="0"/>
+          </a:p>
+        </p:txBody>
+      </p:sp>
+      <p:sp>
+        <p:nvSpPr>
+          <p:cNvPr id="11" name="Shape 9"/>
+          <p:cNvSpPr/>
+          <p:nvPr/>
+        </p:nvSpPr>
+        <p:spPr>
+          <a:xfrm>
+            <a:off x="731520" y="3566160"/>
+            <a:ext cx="1371600" cy="640080"/>
           </a:xfrm>
           <a:prstGeom prst="rect">
             <a:avLst/>
@@ -5036,35 +6517,40 @@
           <a:solidFill>
             <a:srgbClr val="E5E5E5"/>
           </a:solidFill>
-          <a:ln/>
-        </p:spPr>
-      </p:sp>
-      <p:sp>
-        <p:nvSpPr>
-          <p:cNvPr id="8" name="Text 6"/>
-          <p:cNvSpPr/>
-          <p:nvPr/>
-        </p:nvSpPr>
-        <p:spPr>
-          <a:xfrm>
-            <a:off x="4937760" y="1371600"/>
-            <a:ext cx="3657600" cy="320040"/>
-          </a:xfrm>
-          <a:prstGeom prst="rect">
-            <a:avLst/>
-          </a:prstGeom>
-          <a:noFill/>
-          <a:ln/>
-        </p:spPr>
-        <p:txBody>
-          <a:bodyPr wrap="square" rtlCol="0" anchor="ctr"/>
-          <a:lstStyle/>
-          <a:p>
-            <a:pPr indent="0" marL="0">
-              <a:buNone/>
-            </a:pPr>
-            <a:r>
-              <a:rPr lang="en-US" sz="1400" b="1" dirty="0">
+          <a:ln w="12700">
+            <a:solidFill>
+              <a:srgbClr val="333333"/>
+            </a:solidFill>
+            <a:prstDash val="solid"/>
+          </a:ln>
+        </p:spPr>
+      </p:sp>
+      <p:sp>
+        <p:nvSpPr>
+          <p:cNvPr id="12" name="Text 10"/>
+          <p:cNvSpPr/>
+          <p:nvPr/>
+        </p:nvSpPr>
+        <p:spPr>
+          <a:xfrm>
+            <a:off x="731520" y="3749040"/>
+            <a:ext cx="1371600" cy="274320"/>
+          </a:xfrm>
+          <a:prstGeom prst="rect">
+            <a:avLst/>
+          </a:prstGeom>
+          <a:noFill/>
+          <a:ln/>
+        </p:spPr>
+        <p:txBody>
+          <a:bodyPr wrap="square" rtlCol="0" anchor="ctr"/>
+          <a:lstStyle/>
+          <a:p>
+            <a:pPr algn="ctr" indent="0" marL="0">
+              <a:buNone/>
+            </a:pPr>
+            <a:r>
+              <a:rPr lang="en-US" sz="1100" dirty="0">
                 <a:solidFill>
                   <a:srgbClr val="1A1A1A"/>
                 </a:solidFill>
@@ -5072,94 +6558,38 @@
                 <a:ea typeface="Arial" pitchFamily="34" charset="-122"/>
                 <a:cs typeface="Arial" pitchFamily="34" charset="-120"/>
               </a:rPr>
-              <a:t>Monitoring &amp; Fixes</a:t>
-            </a:r>
-            <a:endParaRPr lang="en-US" sz="1400" dirty="0"/>
-          </a:p>
-        </p:txBody>
-      </p:sp>
-      <p:sp>
-        <p:nvSpPr>
-          <p:cNvPr id="9" name="Text 7"/>
-          <p:cNvSpPr/>
-          <p:nvPr/>
-        </p:nvSpPr>
-        <p:spPr>
-          <a:xfrm>
-            <a:off x="4937760" y="1737360"/>
-            <a:ext cx="3566160" cy="1371600"/>
-          </a:xfrm>
-          <a:prstGeom prst="rect">
-            <a:avLst/>
-          </a:prstGeom>
-          <a:noFill/>
-          <a:ln/>
-        </p:spPr>
-        <p:txBody>
-          <a:bodyPr wrap="square" rtlCol="0" anchor="ctr"/>
-          <a:lstStyle/>
-          <a:p>
-            <a:pPr indent="0" marL="0">
-              <a:buNone/>
-            </a:pPr>
-            <a:r>
-              <a:rPr lang="en-US" sz="1200" dirty="0">
-                <a:solidFill>
-                  <a:srgbClr val="333333"/>
-                </a:solidFill>
-                <a:latin typeface="Arial" pitchFamily="34" charset="0"/>
-                <a:ea typeface="Arial" pitchFamily="34" charset="-122"/>
-                <a:cs typeface="Arial" pitchFamily="34" charset="-120"/>
-              </a:rPr>
-              <a:t>• Review and update alerts for Lanxy</a:t>
-            </a:r>
-            <a:endParaRPr lang="en-US" sz="1200" dirty="0"/>
-          </a:p>
-          <a:p>
-            <a:pPr indent="0" marL="0">
-              <a:buNone/>
-            </a:pPr>
-            <a:r>
-              <a:rPr lang="en-US" sz="1200" dirty="0">
-                <a:solidFill>
-                  <a:srgbClr val="333333"/>
-                </a:solidFill>
-                <a:latin typeface="Arial" pitchFamily="34" charset="0"/>
-                <a:ea typeface="Arial" pitchFamily="34" charset="-122"/>
-                <a:cs typeface="Arial" pitchFamily="34" charset="-120"/>
-              </a:rPr>
-              <a:t>• Fix FTFY high for proxy app</a:t>
-            </a:r>
-            <a:endParaRPr lang="en-US" sz="1200" dirty="0"/>
-          </a:p>
-        </p:txBody>
-      </p:sp>
-      <p:sp>
-        <p:nvSpPr>
-          <p:cNvPr id="10" name="Text 8"/>
-          <p:cNvSpPr/>
-          <p:nvPr/>
-        </p:nvSpPr>
-        <p:spPr>
-          <a:xfrm>
-            <a:off x="457200" y="3474720"/>
-            <a:ext cx="8229600" cy="320040"/>
-          </a:xfrm>
-          <a:prstGeom prst="rect">
-            <a:avLst/>
-          </a:prstGeom>
-          <a:noFill/>
-          <a:ln/>
-        </p:spPr>
-        <p:txBody>
-          <a:bodyPr wrap="square" rtlCol="0" anchor="ctr"/>
-          <a:lstStyle/>
-          <a:p>
-            <a:pPr indent="0" marL="0">
-              <a:buNone/>
-            </a:pPr>
-            <a:r>
-              <a:rPr lang="en-US" sz="1400" b="1" dirty="0">
+              <a:t>Frontend</a:t>
+            </a:r>
+            <a:endParaRPr lang="en-US" sz="1100" dirty="0"/>
+          </a:p>
+        </p:txBody>
+      </p:sp>
+      <p:sp>
+        <p:nvSpPr>
+          <p:cNvPr id="13" name="Text 11"/>
+          <p:cNvSpPr/>
+          <p:nvPr/>
+        </p:nvSpPr>
+        <p:spPr>
+          <a:xfrm>
+            <a:off x="2194560" y="3657600"/>
+            <a:ext cx="457200" cy="457200"/>
+          </a:xfrm>
+          <a:prstGeom prst="rect">
+            <a:avLst/>
+          </a:prstGeom>
+          <a:noFill/>
+          <a:ln/>
+        </p:spPr>
+        <p:txBody>
+          <a:bodyPr wrap="square" rtlCol="0" anchor="ctr"/>
+          <a:lstStyle/>
+          <a:p>
+            <a:pPr indent="0" marL="0">
+              <a:buNone/>
+            </a:pPr>
+            <a:r>
+              <a:rPr lang="en-US" sz="2000" dirty="0">
                 <a:solidFill>
                   <a:srgbClr val="1A1A1A"/>
                 </a:solidFill>
@@ -5167,22 +6597,22 @@
                 <a:ea typeface="Arial" pitchFamily="34" charset="-122"/>
                 <a:cs typeface="Arial" pitchFamily="34" charset="-120"/>
               </a:rPr>
-              <a:t>Environments Updated</a:t>
-            </a:r>
-            <a:endParaRPr lang="en-US" sz="1400" dirty="0"/>
-          </a:p>
-        </p:txBody>
-      </p:sp>
-      <p:sp>
-        <p:nvSpPr>
-          <p:cNvPr id="11" name="Shape 9"/>
-          <p:cNvSpPr/>
-          <p:nvPr/>
-        </p:nvSpPr>
-        <p:spPr>
-          <a:xfrm>
-            <a:off x="457200" y="3840480"/>
-            <a:ext cx="2011680" cy="548640"/>
+              <a:t>→</a:t>
+            </a:r>
+            <a:endParaRPr lang="en-US" sz="2000" dirty="0"/>
+          </a:p>
+        </p:txBody>
+      </p:sp>
+      <p:sp>
+        <p:nvSpPr>
+          <p:cNvPr id="14" name="Shape 12"/>
+          <p:cNvSpPr/>
+          <p:nvPr/>
+        </p:nvSpPr>
+        <p:spPr>
+          <a:xfrm>
+            <a:off x="2743200" y="3566160"/>
+            <a:ext cx="1645920" cy="640080"/>
           </a:xfrm>
           <a:prstGeom prst="rect">
             <a:avLst/>
@@ -5195,14 +6625,14 @@
       </p:sp>
       <p:sp>
         <p:nvSpPr>
-          <p:cNvPr id="12" name="Text 10"/>
-          <p:cNvSpPr/>
-          <p:nvPr/>
-        </p:nvSpPr>
-        <p:spPr>
-          <a:xfrm>
-            <a:off x="457200" y="3977640"/>
-            <a:ext cx="2011680" cy="274320"/>
+          <p:cNvPr id="15" name="Text 13"/>
+          <p:cNvSpPr/>
+          <p:nvPr/>
+        </p:nvSpPr>
+        <p:spPr>
+          <a:xfrm>
+            <a:off x="2743200" y="3749040"/>
+            <a:ext cx="1645920" cy="274320"/>
           </a:xfrm>
           <a:prstGeom prst="rect">
             <a:avLst/>
@@ -5218,7 +6648,7 @@
               <a:buNone/>
             </a:pPr>
             <a:r>
-              <a:rPr lang="en-US" sz="1200" dirty="0">
+              <a:rPr lang="en-US" sz="1100" b="1" dirty="0">
                 <a:solidFill>
                   <a:srgbClr val="FFFFFF"/>
                 </a:solidFill>
@@ -5226,42 +6656,86 @@
                 <a:ea typeface="Arial" pitchFamily="34" charset="-122"/>
                 <a:cs typeface="Arial" pitchFamily="34" charset="-120"/>
               </a:rPr>
-              <a:t>Development</a:t>
-            </a:r>
-            <a:endParaRPr lang="en-US" sz="1200" dirty="0"/>
-          </a:p>
-        </p:txBody>
-      </p:sp>
-      <p:sp>
-        <p:nvSpPr>
-          <p:cNvPr id="13" name="Shape 11"/>
-          <p:cNvSpPr/>
-          <p:nvPr/>
-        </p:nvSpPr>
-        <p:spPr>
-          <a:xfrm>
-            <a:off x="2651760" y="3840480"/>
-            <a:ext cx="2011680" cy="548640"/>
+              <a:t>LANXY</a:t>
+            </a:r>
+            <a:endParaRPr lang="en-US" sz="1100" dirty="0"/>
+          </a:p>
+        </p:txBody>
+      </p:sp>
+      <p:sp>
+        <p:nvSpPr>
+          <p:cNvPr id="16" name="Text 14"/>
+          <p:cNvSpPr/>
+          <p:nvPr/>
+        </p:nvSpPr>
+        <p:spPr>
+          <a:xfrm>
+            <a:off x="4480560" y="3657600"/>
+            <a:ext cx="457200" cy="457200"/>
+          </a:xfrm>
+          <a:prstGeom prst="rect">
+            <a:avLst/>
+          </a:prstGeom>
+          <a:noFill/>
+          <a:ln/>
+        </p:spPr>
+        <p:txBody>
+          <a:bodyPr wrap="square" rtlCol="0" anchor="ctr"/>
+          <a:lstStyle/>
+          <a:p>
+            <a:pPr indent="0" marL="0">
+              <a:buNone/>
+            </a:pPr>
+            <a:r>
+              <a:rPr lang="en-US" sz="2000" dirty="0">
+                <a:solidFill>
+                  <a:srgbClr val="1A1A1A"/>
+                </a:solidFill>
+                <a:latin typeface="Arial" pitchFamily="34" charset="0"/>
+                <a:ea typeface="Arial" pitchFamily="34" charset="-122"/>
+                <a:cs typeface="Arial" pitchFamily="34" charset="-120"/>
+              </a:rPr>
+              <a:t>→</a:t>
+            </a:r>
+            <a:endParaRPr lang="en-US" sz="2000" dirty="0"/>
+          </a:p>
+        </p:txBody>
+      </p:sp>
+      <p:sp>
+        <p:nvSpPr>
+          <p:cNvPr id="17" name="Shape 15"/>
+          <p:cNvSpPr/>
+          <p:nvPr/>
+        </p:nvSpPr>
+        <p:spPr>
+          <a:xfrm>
+            <a:off x="5029200" y="3566160"/>
+            <a:ext cx="1371600" cy="640080"/>
           </a:xfrm>
           <a:prstGeom prst="rect">
             <a:avLst/>
           </a:prstGeom>
           <a:solidFill>
-            <a:srgbClr val="1A1A1A"/>
+            <a:srgbClr val="E5E5E5"/>
           </a:solidFill>
-          <a:ln/>
-        </p:spPr>
-      </p:sp>
-      <p:sp>
-        <p:nvSpPr>
-          <p:cNvPr id="14" name="Text 12"/>
-          <p:cNvSpPr/>
-          <p:nvPr/>
-        </p:nvSpPr>
-        <p:spPr>
-          <a:xfrm>
-            <a:off x="2651760" y="3977640"/>
-            <a:ext cx="2011680" cy="274320"/>
+          <a:ln w="12700">
+            <a:solidFill>
+              <a:srgbClr val="333333"/>
+            </a:solidFill>
+            <a:prstDash val="solid"/>
+          </a:ln>
+        </p:spPr>
+      </p:sp>
+      <p:sp>
+        <p:nvSpPr>
+          <p:cNvPr id="18" name="Text 16"/>
+          <p:cNvSpPr/>
+          <p:nvPr/>
+        </p:nvSpPr>
+        <p:spPr>
+          <a:xfrm>
+            <a:off x="5029200" y="3749040"/>
+            <a:ext cx="1371600" cy="274320"/>
           </a:xfrm>
           <a:prstGeom prst="rect">
             <a:avLst/>
@@ -5277,17 +6751,120 @@
               <a:buNone/>
             </a:pPr>
             <a:r>
-              <a:rPr lang="en-US" sz="1200" dirty="0">
-                <a:solidFill>
-                  <a:srgbClr val="FFFFFF"/>
-                </a:solidFill>
-                <a:latin typeface="Arial" pitchFamily="34" charset="0"/>
-                <a:ea typeface="Arial" pitchFamily="34" charset="-122"/>
-                <a:cs typeface="Arial" pitchFamily="34" charset="-120"/>
-              </a:rPr>
-              <a:t>Test</a:t>
-            </a:r>
-            <a:endParaRPr lang="en-US" sz="1200" dirty="0"/>
+              <a:rPr lang="en-US" sz="1000" dirty="0">
+                <a:solidFill>
+                  <a:srgbClr val="1A1A1A"/>
+                </a:solidFill>
+                <a:latin typeface="Arial" pitchFamily="34" charset="0"/>
+                <a:ea typeface="Arial" pitchFamily="34" charset="-122"/>
+                <a:cs typeface="Arial" pitchFamily="34" charset="-120"/>
+              </a:rPr>
+              <a:t>Backend A</a:t>
+            </a:r>
+            <a:endParaRPr lang="en-US" sz="1000" dirty="0"/>
+          </a:p>
+        </p:txBody>
+      </p:sp>
+      <p:sp>
+        <p:nvSpPr>
+          <p:cNvPr id="19" name="Shape 17"/>
+          <p:cNvSpPr/>
+          <p:nvPr/>
+        </p:nvSpPr>
+        <p:spPr>
+          <a:xfrm>
+            <a:off x="6583680" y="3566160"/>
+            <a:ext cx="1371600" cy="640080"/>
+          </a:xfrm>
+          <a:prstGeom prst="rect">
+            <a:avLst/>
+          </a:prstGeom>
+          <a:solidFill>
+            <a:srgbClr val="E5E5E5"/>
+          </a:solidFill>
+          <a:ln w="12700">
+            <a:solidFill>
+              <a:srgbClr val="333333"/>
+            </a:solidFill>
+            <a:prstDash val="solid"/>
+          </a:ln>
+        </p:spPr>
+      </p:sp>
+      <p:sp>
+        <p:nvSpPr>
+          <p:cNvPr id="20" name="Text 18"/>
+          <p:cNvSpPr/>
+          <p:nvPr/>
+        </p:nvSpPr>
+        <p:spPr>
+          <a:xfrm>
+            <a:off x="6583680" y="3749040"/>
+            <a:ext cx="1371600" cy="274320"/>
+          </a:xfrm>
+          <a:prstGeom prst="rect">
+            <a:avLst/>
+          </a:prstGeom>
+          <a:noFill/>
+          <a:ln/>
+        </p:spPr>
+        <p:txBody>
+          <a:bodyPr wrap="square" rtlCol="0" anchor="ctr"/>
+          <a:lstStyle/>
+          <a:p>
+            <a:pPr algn="ctr" indent="0" marL="0">
+              <a:buNone/>
+            </a:pPr>
+            <a:r>
+              <a:rPr lang="en-US" sz="1000" dirty="0">
+                <a:solidFill>
+                  <a:srgbClr val="1A1A1A"/>
+                </a:solidFill>
+                <a:latin typeface="Arial" pitchFamily="34" charset="0"/>
+                <a:ea typeface="Arial" pitchFamily="34" charset="-122"/>
+                <a:cs typeface="Arial" pitchFamily="34" charset="-120"/>
+              </a:rPr>
+              <a:t>Backend B</a:t>
+            </a:r>
+            <a:endParaRPr lang="en-US" sz="1000" dirty="0"/>
+          </a:p>
+        </p:txBody>
+      </p:sp>
+      <p:sp>
+        <p:nvSpPr>
+          <p:cNvPr id="21" name="Text 19"/>
+          <p:cNvSpPr/>
+          <p:nvPr/>
+        </p:nvSpPr>
+        <p:spPr>
+          <a:xfrm>
+            <a:off x="457200" y="4389120"/>
+            <a:ext cx="8229600" cy="320040"/>
+          </a:xfrm>
+          <a:prstGeom prst="rect">
+            <a:avLst/>
+          </a:prstGeom>
+          <a:noFill/>
+          <a:ln/>
+        </p:spPr>
+        <p:txBody>
+          <a:bodyPr wrap="square" rtlCol="0" anchor="ctr"/>
+          <a:lstStyle/>
+          <a:p>
+            <a:pPr algn="ctr" indent="0" marL="0">
+              <a:buNone/>
+            </a:pPr>
+            <a:r>
+              <a:rPr lang="en-US" sz="1100" i="1" dirty="0">
+                <a:solidFill>
+                  <a:srgbClr val="666666"/>
+                </a:solidFill>
+                <a:latin typeface="Arial" pitchFamily="34" charset="0"/>
+                <a:ea typeface="Arial" pitchFamily="34" charset="-122"/>
+                <a:cs typeface="Arial" pitchFamily="34" charset="-120"/>
+              </a:rPr>
+              <a:t>Teams only need to configure LANXY if they need custom backends or route overrides</a:t>
+            </a:r>
+            <a:endParaRPr lang="en-US" sz="1100" dirty="0"/>
           </a:p>
         </p:txBody>
       </p:sp>
@@ -5356,7 +6933,7 @@
                 <a:ea typeface="Arial" pitchFamily="34" charset="-122"/>
                 <a:cs typeface="Arial" pitchFamily="34" charset="-120"/>
               </a:rPr>
-              <a:t>New Bicep Modules</a:t>
+              <a:t>What is ChatOps?</a:t>
             </a:r>
             <a:endParaRPr lang="en-US" sz="3200" dirty="0"/>
           </a:p>
@@ -5387,15 +6964,74 @@
               <a:buNone/>
             </a:pPr>
             <a:r>
+              <a:rPr lang="en-US" sz="1400" dirty="0">
+                <a:solidFill>
+                  <a:srgbClr val="666666"/>
+                </a:solidFill>
+                <a:latin typeface="Arial" pitchFamily="34" charset="0"/>
+                <a:ea typeface="Arial" pitchFamily="34" charset="-122"/>
+                <a:cs typeface="Arial" pitchFamily="34" charset="-120"/>
+              </a:rPr>
+              <a:t>DevOps Automation via Microsoft Teams</a:t>
+            </a:r>
+            <a:endParaRPr lang="en-US" sz="1400" dirty="0"/>
+          </a:p>
+        </p:txBody>
+      </p:sp>
+      <p:sp>
+        <p:nvSpPr>
+          <p:cNvPr id="4" name="Shape 2"/>
+          <p:cNvSpPr/>
+          <p:nvPr/>
+        </p:nvSpPr>
+        <p:spPr>
+          <a:xfrm>
+            <a:off x="457200" y="1280160"/>
+            <a:ext cx="8229600" cy="914400"/>
+          </a:xfrm>
+          <a:prstGeom prst="rect">
+            <a:avLst/>
+          </a:prstGeom>
+          <a:solidFill>
+            <a:srgbClr val="E5E5E5"/>
+          </a:solidFill>
+          <a:ln/>
+        </p:spPr>
+      </p:sp>
+      <p:sp>
+        <p:nvSpPr>
+          <p:cNvPr id="5" name="Text 3"/>
+          <p:cNvSpPr/>
+          <p:nvPr/>
+        </p:nvSpPr>
+        <p:spPr>
+          <a:xfrm>
+            <a:off x="640080" y="1417320"/>
+            <a:ext cx="7863840" cy="640080"/>
+          </a:xfrm>
+          <a:prstGeom prst="rect">
+            <a:avLst/>
+          </a:prstGeom>
+          <a:noFill/>
+          <a:ln/>
+        </p:spPr>
+        <p:txBody>
+          <a:bodyPr wrap="square" rtlCol="0" anchor="ctr"/>
+          <a:lstStyle/>
+          <a:p>
+            <a:pPr indent="0" marL="0">
+              <a:buNone/>
+            </a:pPr>
+            <a:r>
               <a:rPr lang="en-US" sz="1300" dirty="0">
                 <a:solidFill>
-                  <a:srgbClr val="666666"/>
-                </a:solidFill>
-                <a:latin typeface="Arial" pitchFamily="34" charset="0"/>
-                <a:ea typeface="Arial" pitchFamily="34" charset="-122"/>
-                <a:cs typeface="Arial" pitchFamily="34" charset="-120"/>
-              </a:rPr>
-              <a:t>Infrastructure as Code additions</a:t>
+                  <a:srgbClr val="333333"/>
+                </a:solidFill>
+                <a:latin typeface="Arial" pitchFamily="34" charset="0"/>
+                <a:ea typeface="Arial" pitchFamily="34" charset="-122"/>
+                <a:cs typeface="Arial" pitchFamily="34" charset="-120"/>
+              </a:rPr>
+              <a:t>ChatOps brings operational commands into chat platforms, enabling teams to execute infrastructure tasks through conversational interfaces instead of complex CLI or portal navigation.</a:t>
             </a:r>
             <a:endParaRPr lang="en-US" sz="1300" dirty="0"/>
           </a:p>
@@ -5403,14 +7039,53 @@
       </p:sp>
       <p:sp>
         <p:nvSpPr>
-          <p:cNvPr id="4" name="Shape 2"/>
-          <p:cNvSpPr/>
-          <p:nvPr/>
-        </p:nvSpPr>
-        <p:spPr>
-          <a:xfrm>
-            <a:off x="457200" y="1280160"/>
-            <a:ext cx="3931920" cy="2286000"/>
+          <p:cNvPr id="6" name="Text 4"/>
+          <p:cNvSpPr/>
+          <p:nvPr/>
+        </p:nvSpPr>
+        <p:spPr>
+          <a:xfrm>
+            <a:off x="457200" y="2377440"/>
+            <a:ext cx="8229600" cy="320040"/>
+          </a:xfrm>
+          <a:prstGeom prst="rect">
+            <a:avLst/>
+          </a:prstGeom>
+          <a:noFill/>
+          <a:ln/>
+        </p:spPr>
+        <p:txBody>
+          <a:bodyPr wrap="square" rtlCol="0" anchor="ctr"/>
+          <a:lstStyle/>
+          <a:p>
+            <a:pPr indent="0" marL="0">
+              <a:buNone/>
+            </a:pPr>
+            <a:r>
+              <a:rPr lang="en-US" sz="1400" b="1" dirty="0">
+                <a:solidFill>
+                  <a:srgbClr val="1A1A1A"/>
+                </a:solidFill>
+                <a:latin typeface="Arial" pitchFamily="34" charset="0"/>
+                <a:ea typeface="Arial" pitchFamily="34" charset="-122"/>
+                <a:cs typeface="Arial" pitchFamily="34" charset="-120"/>
+              </a:rPr>
+              <a:t>Benefits</a:t>
+            </a:r>
+            <a:endParaRPr lang="en-US" sz="1400" dirty="0"/>
+          </a:p>
+        </p:txBody>
+      </p:sp>
+      <p:sp>
+        <p:nvSpPr>
+          <p:cNvPr id="7" name="Shape 5"/>
+          <p:cNvSpPr/>
+          <p:nvPr/>
+        </p:nvSpPr>
+        <p:spPr>
+          <a:xfrm>
+            <a:off x="457200" y="2743200"/>
+            <a:ext cx="1965960" cy="1188720"/>
           </a:xfrm>
           <a:prstGeom prst="rect">
             <a:avLst/>
@@ -5418,9 +7093,9 @@
           <a:solidFill>
             <a:srgbClr val="FFFFFF"/>
           </a:solidFill>
-          <a:ln w="25400">
+          <a:ln w="12700">
             <a:solidFill>
-              <a:srgbClr val="1A1A1A"/>
+              <a:srgbClr val="333333"/>
             </a:solidFill>
             <a:prstDash val="solid"/>
           </a:ln>
@@ -5428,30 +7103,30 @@
       </p:sp>
       <p:sp>
         <p:nvSpPr>
-          <p:cNvPr id="5" name="Text 3"/>
-          <p:cNvSpPr/>
-          <p:nvPr/>
-        </p:nvSpPr>
-        <p:spPr>
-          <a:xfrm>
-            <a:off x="640080" y="1417320"/>
-            <a:ext cx="3657600" cy="365760"/>
-          </a:xfrm>
-          <a:prstGeom prst="rect">
-            <a:avLst/>
-          </a:prstGeom>
-          <a:noFill/>
-          <a:ln/>
-        </p:spPr>
-        <p:txBody>
-          <a:bodyPr wrap="square" rtlCol="0" anchor="ctr"/>
-          <a:lstStyle/>
-          <a:p>
-            <a:pPr indent="0" marL="0">
-              <a:buNone/>
-            </a:pPr>
-            <a:r>
-              <a:rPr lang="en-US" sz="1600" b="1" dirty="0">
+          <p:cNvPr id="8" name="Text 6"/>
+          <p:cNvSpPr/>
+          <p:nvPr/>
+        </p:nvSpPr>
+        <p:spPr>
+          <a:xfrm>
+            <a:off x="548640" y="2834640"/>
+            <a:ext cx="1783080" cy="320040"/>
+          </a:xfrm>
+          <a:prstGeom prst="rect">
+            <a:avLst/>
+          </a:prstGeom>
+          <a:noFill/>
+          <a:ln/>
+        </p:spPr>
+        <p:txBody>
+          <a:bodyPr wrap="square" rtlCol="0" anchor="ctr"/>
+          <a:lstStyle/>
+          <a:p>
+            <a:pPr indent="0" marL="0">
+              <a:buNone/>
+            </a:pPr>
+            <a:r>
+              <a:rPr lang="en-US" sz="1200" b="1" dirty="0">
                 <a:solidFill>
                   <a:srgbClr val="1A1A1A"/>
                 </a:solidFill>
@@ -5459,38 +7134,38 @@
                 <a:ea typeface="Arial" pitchFamily="34" charset="-122"/>
                 <a:cs typeface="Arial" pitchFamily="34" charset="-120"/>
               </a:rPr>
-              <a:t>Log Analytics Workspace</a:t>
-            </a:r>
-            <a:endParaRPr lang="en-US" sz="1600" dirty="0"/>
-          </a:p>
-        </p:txBody>
-      </p:sp>
-      <p:sp>
-        <p:nvSpPr>
-          <p:cNvPr id="6" name="Text 4"/>
-          <p:cNvSpPr/>
-          <p:nvPr/>
-        </p:nvSpPr>
-        <p:spPr>
-          <a:xfrm>
-            <a:off x="640080" y="1828800"/>
-            <a:ext cx="3566160" cy="1645920"/>
-          </a:xfrm>
-          <a:prstGeom prst="rect">
-            <a:avLst/>
-          </a:prstGeom>
-          <a:noFill/>
-          <a:ln/>
-        </p:spPr>
-        <p:txBody>
-          <a:bodyPr wrap="square" rtlCol="0" anchor="ctr"/>
-          <a:lstStyle/>
-          <a:p>
-            <a:pPr indent="0" marL="0">
-              <a:buNone/>
-            </a:pPr>
-            <a:r>
-              <a:rPr lang="en-US" sz="1100" b="1" dirty="0">
+              <a:t>Speed</a:t>
+            </a:r>
+            <a:endParaRPr lang="en-US" sz="1200" dirty="0"/>
+          </a:p>
+        </p:txBody>
+      </p:sp>
+      <p:sp>
+        <p:nvSpPr>
+          <p:cNvPr id="9" name="Text 7"/>
+          <p:cNvSpPr/>
+          <p:nvPr/>
+        </p:nvSpPr>
+        <p:spPr>
+          <a:xfrm>
+            <a:off x="548640" y="3154680"/>
+            <a:ext cx="1783080" cy="685800"/>
+          </a:xfrm>
+          <a:prstGeom prst="rect">
+            <a:avLst/>
+          </a:prstGeom>
+          <a:noFill/>
+          <a:ln/>
+        </p:spPr>
+        <p:txBody>
+          <a:bodyPr wrap="square" rtlCol="0" anchor="ctr"/>
+          <a:lstStyle/>
+          <a:p>
+            <a:pPr indent="0" marL="0">
+              <a:buNone/>
+            </a:pPr>
+            <a:r>
+              <a:rPr lang="en-US" sz="1000" dirty="0">
                 <a:solidFill>
                   <a:srgbClr val="333333"/>
                 </a:solidFill>
@@ -5498,108 +7173,22 @@
                 <a:ea typeface="Arial" pitchFamily="34" charset="-122"/>
                 <a:cs typeface="Arial" pitchFamily="34" charset="-120"/>
               </a:rPr>
-              <a:t>Purpose:</a:t>
-            </a:r>
-            <a:endParaRPr lang="en-US" sz="1100" dirty="0"/>
-          </a:p>
-          <a:p>
-            <a:pPr indent="0" marL="0">
-              <a:buNone/>
-            </a:pPr>
-            <a:r>
-              <a:rPr lang="en-US" sz="1100" dirty="0">
-                <a:solidFill>
-                  <a:srgbClr val="333333"/>
-                </a:solidFill>
-                <a:latin typeface="Arial" pitchFamily="34" charset="0"/>
-                <a:ea typeface="Arial" pitchFamily="34" charset="-122"/>
-                <a:cs typeface="Arial" pitchFamily="34" charset="-120"/>
-              </a:rPr>
-              <a:t>Centralized logging and monitoring
-</a:t>
-            </a:r>
-            <a:endParaRPr lang="en-US" sz="1100" dirty="0"/>
-          </a:p>
-          <a:p>
-            <a:pPr indent="0" marL="0">
-              <a:buNone/>
-            </a:pPr>
-            <a:r>
-              <a:rPr lang="en-US" sz="1100" b="1" dirty="0">
-                <a:solidFill>
-                  <a:srgbClr val="333333"/>
-                </a:solidFill>
-                <a:latin typeface="Arial" pitchFamily="34" charset="0"/>
-                <a:ea typeface="Arial" pitchFamily="34" charset="-122"/>
-                <a:cs typeface="Arial" pitchFamily="34" charset="-120"/>
-              </a:rPr>
-              <a:t>Features:</a:t>
-            </a:r>
-            <a:endParaRPr lang="en-US" sz="1100" dirty="0"/>
-          </a:p>
-          <a:p>
-            <a:pPr indent="0" marL="0">
-              <a:buNone/>
-            </a:pPr>
-            <a:r>
-              <a:rPr lang="en-US" sz="1100" dirty="0">
-                <a:solidFill>
-                  <a:srgbClr val="333333"/>
-                </a:solidFill>
-                <a:latin typeface="Arial" pitchFamily="34" charset="0"/>
-                <a:ea typeface="Arial" pitchFamily="34" charset="-122"/>
-                <a:cs typeface="Arial" pitchFamily="34" charset="-120"/>
-              </a:rPr>
-              <a:t>• Query-based log analysis</a:t>
-            </a:r>
-            <a:endParaRPr lang="en-US" sz="1100" dirty="0"/>
-          </a:p>
-          <a:p>
-            <a:pPr indent="0" marL="0">
-              <a:buNone/>
-            </a:pPr>
-            <a:r>
-              <a:rPr lang="en-US" sz="1100" dirty="0">
-                <a:solidFill>
-                  <a:srgbClr val="333333"/>
-                </a:solidFill>
-                <a:latin typeface="Arial" pitchFamily="34" charset="0"/>
-                <a:ea typeface="Arial" pitchFamily="34" charset="-122"/>
-                <a:cs typeface="Arial" pitchFamily="34" charset="-120"/>
-              </a:rPr>
-              <a:t>• Alerts and dashboards</a:t>
-            </a:r>
-            <a:endParaRPr lang="en-US" sz="1100" dirty="0"/>
-          </a:p>
-          <a:p>
-            <a:pPr indent="0" marL="0">
-              <a:buNone/>
-            </a:pPr>
-            <a:r>
-              <a:rPr lang="en-US" sz="1100" dirty="0">
-                <a:solidFill>
-                  <a:srgbClr val="333333"/>
-                </a:solidFill>
-                <a:latin typeface="Arial" pitchFamily="34" charset="0"/>
-                <a:ea typeface="Arial" pitchFamily="34" charset="-122"/>
-                <a:cs typeface="Arial" pitchFamily="34" charset="-120"/>
-              </a:rPr>
-              <a:t>• Integration with Azure Monitor</a:t>
-            </a:r>
-            <a:endParaRPr lang="en-US" sz="1100" dirty="0"/>
-          </a:p>
-        </p:txBody>
-      </p:sp>
-      <p:sp>
-        <p:nvSpPr>
-          <p:cNvPr id="7" name="Shape 5"/>
-          <p:cNvSpPr/>
-          <p:nvPr/>
-        </p:nvSpPr>
-        <p:spPr>
-          <a:xfrm>
-            <a:off x="4754880" y="1280160"/>
-            <a:ext cx="3931920" cy="2286000"/>
+              <a:t>Execute commands instantly from Teams</a:t>
+            </a:r>
+            <a:endParaRPr lang="en-US" sz="1000" dirty="0"/>
+          </a:p>
+        </p:txBody>
+      </p:sp>
+      <p:sp>
+        <p:nvSpPr>
+          <p:cNvPr id="10" name="Shape 8"/>
+          <p:cNvSpPr/>
+          <p:nvPr/>
+        </p:nvSpPr>
+        <p:spPr>
+          <a:xfrm>
+            <a:off x="2606040" y="2743200"/>
+            <a:ext cx="1965960" cy="1188720"/>
           </a:xfrm>
           <a:prstGeom prst="rect">
             <a:avLst/>
@@ -5607,9 +7196,9 @@
           <a:solidFill>
             <a:srgbClr val="FFFFFF"/>
           </a:solidFill>
-          <a:ln w="25400">
+          <a:ln w="12700">
             <a:solidFill>
-              <a:srgbClr val="1A1A1A"/>
+              <a:srgbClr val="333333"/>
             </a:solidFill>
             <a:prstDash val="solid"/>
           </a:ln>
@@ -5617,30 +7206,30 @@
       </p:sp>
       <p:sp>
         <p:nvSpPr>
-          <p:cNvPr id="8" name="Text 6"/>
-          <p:cNvSpPr/>
-          <p:nvPr/>
-        </p:nvSpPr>
-        <p:spPr>
-          <a:xfrm>
-            <a:off x="4937760" y="1417320"/>
-            <a:ext cx="3657600" cy="365760"/>
-          </a:xfrm>
-          <a:prstGeom prst="rect">
-            <a:avLst/>
-          </a:prstGeom>
-          <a:noFill/>
-          <a:ln/>
-        </p:spPr>
-        <p:txBody>
-          <a:bodyPr wrap="square" rtlCol="0" anchor="ctr"/>
-          <a:lstStyle/>
-          <a:p>
-            <a:pPr indent="0" marL="0">
-              <a:buNone/>
-            </a:pPr>
-            <a:r>
-              <a:rPr lang="en-US" sz="1600" b="1" dirty="0">
+          <p:cNvPr id="11" name="Text 9"/>
+          <p:cNvSpPr/>
+          <p:nvPr/>
+        </p:nvSpPr>
+        <p:spPr>
+          <a:xfrm>
+            <a:off x="2697480" y="2834640"/>
+            <a:ext cx="1783080" cy="320040"/>
+          </a:xfrm>
+          <a:prstGeom prst="rect">
+            <a:avLst/>
+          </a:prstGeom>
+          <a:noFill/>
+          <a:ln/>
+        </p:spPr>
+        <p:txBody>
+          <a:bodyPr wrap="square" rtlCol="0" anchor="ctr"/>
+          <a:lstStyle/>
+          <a:p>
+            <a:pPr indent="0" marL="0">
+              <a:buNone/>
+            </a:pPr>
+            <a:r>
+              <a:rPr lang="en-US" sz="1200" b="1" dirty="0">
                 <a:solidFill>
                   <a:srgbClr val="1A1A1A"/>
                 </a:solidFill>
@@ -5648,38 +7237,38 @@
                 <a:ea typeface="Arial" pitchFamily="34" charset="-122"/>
                 <a:cs typeface="Arial" pitchFamily="34" charset="-120"/>
               </a:rPr>
-              <a:t>Application Insights</a:t>
-            </a:r>
-            <a:endParaRPr lang="en-US" sz="1600" dirty="0"/>
-          </a:p>
-        </p:txBody>
-      </p:sp>
-      <p:sp>
-        <p:nvSpPr>
-          <p:cNvPr id="9" name="Text 7"/>
-          <p:cNvSpPr/>
-          <p:nvPr/>
-        </p:nvSpPr>
-        <p:spPr>
-          <a:xfrm>
-            <a:off x="4937760" y="1828800"/>
-            <a:ext cx="3566160" cy="1645920"/>
-          </a:xfrm>
-          <a:prstGeom prst="rect">
-            <a:avLst/>
-          </a:prstGeom>
-          <a:noFill/>
-          <a:ln/>
-        </p:spPr>
-        <p:txBody>
-          <a:bodyPr wrap="square" rtlCol="0" anchor="ctr"/>
-          <a:lstStyle/>
-          <a:p>
-            <a:pPr indent="0" marL="0">
-              <a:buNone/>
-            </a:pPr>
-            <a:r>
-              <a:rPr lang="en-US" sz="1100" b="1" dirty="0">
+              <a:t>Visibility</a:t>
+            </a:r>
+            <a:endParaRPr lang="en-US" sz="1200" dirty="0"/>
+          </a:p>
+        </p:txBody>
+      </p:sp>
+      <p:sp>
+        <p:nvSpPr>
+          <p:cNvPr id="12" name="Text 10"/>
+          <p:cNvSpPr/>
+          <p:nvPr/>
+        </p:nvSpPr>
+        <p:spPr>
+          <a:xfrm>
+            <a:off x="2697480" y="3154680"/>
+            <a:ext cx="1783080" cy="685800"/>
+          </a:xfrm>
+          <a:prstGeom prst="rect">
+            <a:avLst/>
+          </a:prstGeom>
+          <a:noFill/>
+          <a:ln/>
+        </p:spPr>
+        <p:txBody>
+          <a:bodyPr wrap="square" rtlCol="0" anchor="ctr"/>
+          <a:lstStyle/>
+          <a:p>
+            <a:pPr indent="0" marL="0">
+              <a:buNone/>
+            </a:pPr>
+            <a:r>
+              <a:rPr lang="en-US" sz="1000" dirty="0">
                 <a:solidFill>
                   <a:srgbClr val="333333"/>
                 </a:solidFill>
@@ -5687,16 +7276,102 @@
                 <a:ea typeface="Arial" pitchFamily="34" charset="-122"/>
                 <a:cs typeface="Arial" pitchFamily="34" charset="-120"/>
               </a:rPr>
-              <a:t>Purpose:</a:t>
-            </a:r>
-            <a:endParaRPr lang="en-US" sz="1100" dirty="0"/>
-          </a:p>
-          <a:p>
-            <a:pPr indent="0" marL="0">
-              <a:buNone/>
-            </a:pPr>
-            <a:r>
-              <a:rPr lang="en-US" sz="1100" dirty="0">
+              <a:t>Team sees all actions in shared channel</a:t>
+            </a:r>
+            <a:endParaRPr lang="en-US" sz="1000" dirty="0"/>
+          </a:p>
+        </p:txBody>
+      </p:sp>
+      <p:sp>
+        <p:nvSpPr>
+          <p:cNvPr id="13" name="Shape 11"/>
+          <p:cNvSpPr/>
+          <p:nvPr/>
+        </p:nvSpPr>
+        <p:spPr>
+          <a:xfrm>
+            <a:off x="4754880" y="2743200"/>
+            <a:ext cx="1965960" cy="1188720"/>
+          </a:xfrm>
+          <a:prstGeom prst="rect">
+            <a:avLst/>
+          </a:prstGeom>
+          <a:solidFill>
+            <a:srgbClr val="FFFFFF"/>
+          </a:solidFill>
+          <a:ln w="12700">
+            <a:solidFill>
+              <a:srgbClr val="333333"/>
+            </a:solidFill>
+            <a:prstDash val="solid"/>
+          </a:ln>
+        </p:spPr>
+      </p:sp>
+      <p:sp>
+        <p:nvSpPr>
+          <p:cNvPr id="14" name="Text 12"/>
+          <p:cNvSpPr/>
+          <p:nvPr/>
+        </p:nvSpPr>
+        <p:spPr>
+          <a:xfrm>
+            <a:off x="4846320" y="2834640"/>
+            <a:ext cx="1783080" cy="320040"/>
+          </a:xfrm>
+          <a:prstGeom prst="rect">
+            <a:avLst/>
+          </a:prstGeom>
+          <a:noFill/>
+          <a:ln/>
+        </p:spPr>
+        <p:txBody>
+          <a:bodyPr wrap="square" rtlCol="0" anchor="ctr"/>
+          <a:lstStyle/>
+          <a:p>
+            <a:pPr indent="0" marL="0">
+              <a:buNone/>
+            </a:pPr>
+            <a:r>
+              <a:rPr lang="en-US" sz="1200" b="1" dirty="0">
+                <a:solidFill>
+                  <a:srgbClr val="1A1A1A"/>
+                </a:solidFill>
+                <a:latin typeface="Arial" pitchFamily="34" charset="0"/>
+                <a:ea typeface="Arial" pitchFamily="34" charset="-122"/>
+                <a:cs typeface="Arial" pitchFamily="34" charset="-120"/>
+              </a:rPr>
+              <a:t>Simplicity</a:t>
+            </a:r>
+            <a:endParaRPr lang="en-US" sz="1200" dirty="0"/>
+          </a:p>
+        </p:txBody>
+      </p:sp>
+      <p:sp>
+        <p:nvSpPr>
+          <p:cNvPr id="15" name="Text 13"/>
+          <p:cNvSpPr/>
+          <p:nvPr/>
+        </p:nvSpPr>
+        <p:spPr>
+          <a:xfrm>
+            <a:off x="4846320" y="3154680"/>
+            <a:ext cx="1783080" cy="685800"/>
+          </a:xfrm>
+          <a:prstGeom prst="rect">
+            <a:avLst/>
+          </a:prstGeom>
+          <a:noFill/>
+          <a:ln/>
+        </p:spPr>
+        <p:txBody>
+          <a:bodyPr wrap="square" rtlCol="0" anchor="ctr"/>
+          <a:lstStyle/>
+          <a:p>
+            <a:pPr indent="0" marL="0">
+              <a:buNone/>
+            </a:pPr>
+            <a:r>
+              <a:rPr lang="en-US" sz="1000" dirty="0">
                 <a:solidFill>
                   <a:srgbClr val="333333"/>
                 </a:solidFill>
@@ -5704,17 +7379,102 @@
                 <a:ea typeface="Arial" pitchFamily="34" charset="-122"/>
                 <a:cs typeface="Arial" pitchFamily="34" charset="-120"/>
               </a:rPr>
-              <a:t>Application performance monitoring
-</a:t>
-            </a:r>
-            <a:endParaRPr lang="en-US" sz="1100" dirty="0"/>
-          </a:p>
-          <a:p>
-            <a:pPr indent="0" marL="0">
-              <a:buNone/>
-            </a:pPr>
-            <a:r>
-              <a:rPr lang="en-US" sz="1100" b="1" dirty="0">
+              <a:t>No need to remember complex CLI commands</a:t>
+            </a:r>
+            <a:endParaRPr lang="en-US" sz="1000" dirty="0"/>
+          </a:p>
+        </p:txBody>
+      </p:sp>
+      <p:sp>
+        <p:nvSpPr>
+          <p:cNvPr id="16" name="Shape 14"/>
+          <p:cNvSpPr/>
+          <p:nvPr/>
+        </p:nvSpPr>
+        <p:spPr>
+          <a:xfrm>
+            <a:off x="6903720" y="2743200"/>
+            <a:ext cx="1965960" cy="1188720"/>
+          </a:xfrm>
+          <a:prstGeom prst="rect">
+            <a:avLst/>
+          </a:prstGeom>
+          <a:solidFill>
+            <a:srgbClr val="FFFFFF"/>
+          </a:solidFill>
+          <a:ln w="12700">
+            <a:solidFill>
+              <a:srgbClr val="333333"/>
+            </a:solidFill>
+            <a:prstDash val="solid"/>
+          </a:ln>
+        </p:spPr>
+      </p:sp>
+      <p:sp>
+        <p:nvSpPr>
+          <p:cNvPr id="17" name="Text 15"/>
+          <p:cNvSpPr/>
+          <p:nvPr/>
+        </p:nvSpPr>
+        <p:spPr>
+          <a:xfrm>
+            <a:off x="6995160" y="2834640"/>
+            <a:ext cx="1783080" cy="320040"/>
+          </a:xfrm>
+          <a:prstGeom prst="rect">
+            <a:avLst/>
+          </a:prstGeom>
+          <a:noFill/>
+          <a:ln/>
+        </p:spPr>
+        <p:txBody>
+          <a:bodyPr wrap="square" rtlCol="0" anchor="ctr"/>
+          <a:lstStyle/>
+          <a:p>
+            <a:pPr indent="0" marL="0">
+              <a:buNone/>
+            </a:pPr>
+            <a:r>
+              <a:rPr lang="en-US" sz="1200" b="1" dirty="0">
+                <a:solidFill>
+                  <a:srgbClr val="1A1A1A"/>
+                </a:solidFill>
+                <a:latin typeface="Arial" pitchFamily="34" charset="0"/>
+                <a:ea typeface="Arial" pitchFamily="34" charset="-122"/>
+                <a:cs typeface="Arial" pitchFamily="34" charset="-120"/>
+              </a:rPr>
+              <a:t>Audit Trail</a:t>
+            </a:r>
+            <a:endParaRPr lang="en-US" sz="1200" dirty="0"/>
+          </a:p>
+        </p:txBody>
+      </p:sp>
+      <p:sp>
+        <p:nvSpPr>
+          <p:cNvPr id="18" name="Text 16"/>
+          <p:cNvSpPr/>
+          <p:nvPr/>
+        </p:nvSpPr>
+        <p:spPr>
+          <a:xfrm>
+            <a:off x="6995160" y="3154680"/>
+            <a:ext cx="1783080" cy="685800"/>
+          </a:xfrm>
+          <a:prstGeom prst="rect">
+            <a:avLst/>
+          </a:prstGeom>
+          <a:noFill/>
+          <a:ln/>
+        </p:spPr>
+        <p:txBody>
+          <a:bodyPr wrap="square" rtlCol="0" anchor="ctr"/>
+          <a:lstStyle/>
+          <a:p>
+            <a:pPr indent="0" marL="0">
+              <a:buNone/>
+            </a:pPr>
+            <a:r>
+              <a:rPr lang="en-US" sz="1000" dirty="0">
                 <a:solidFill>
                   <a:srgbClr val="333333"/>
                 </a:solidFill>
@@ -5722,73 +7482,22 @@
                 <a:ea typeface="Arial" pitchFamily="34" charset="-122"/>
                 <a:cs typeface="Arial" pitchFamily="34" charset="-120"/>
               </a:rPr>
-              <a:t>Features:</a:t>
-            </a:r>
-            <a:endParaRPr lang="en-US" sz="1100" dirty="0"/>
-          </a:p>
-          <a:p>
-            <a:pPr indent="0" marL="0">
-              <a:buNone/>
-            </a:pPr>
-            <a:r>
-              <a:rPr lang="en-US" sz="1100" dirty="0">
-                <a:solidFill>
-                  <a:srgbClr val="333333"/>
-                </a:solidFill>
-                <a:latin typeface="Arial" pitchFamily="34" charset="0"/>
-                <a:ea typeface="Arial" pitchFamily="34" charset="-122"/>
-                <a:cs typeface="Arial" pitchFamily="34" charset="-120"/>
-              </a:rPr>
-              <a:t>• Real-time performance metrics</a:t>
-            </a:r>
-            <a:endParaRPr lang="en-US" sz="1100" dirty="0"/>
-          </a:p>
-          <a:p>
-            <a:pPr indent="0" marL="0">
-              <a:buNone/>
-            </a:pPr>
-            <a:r>
-              <a:rPr lang="en-US" sz="1100" dirty="0">
-                <a:solidFill>
-                  <a:srgbClr val="333333"/>
-                </a:solidFill>
-                <a:latin typeface="Arial" pitchFamily="34" charset="0"/>
-                <a:ea typeface="Arial" pitchFamily="34" charset="-122"/>
-                <a:cs typeface="Arial" pitchFamily="34" charset="-120"/>
-              </a:rPr>
-              <a:t>• Exception tracking</a:t>
-            </a:r>
-            <a:endParaRPr lang="en-US" sz="1100" dirty="0"/>
-          </a:p>
-          <a:p>
-            <a:pPr indent="0" marL="0">
-              <a:buNone/>
-            </a:pPr>
-            <a:r>
-              <a:rPr lang="en-US" sz="1100" dirty="0">
-                <a:solidFill>
-                  <a:srgbClr val="333333"/>
-                </a:solidFill>
-                <a:latin typeface="Arial" pitchFamily="34" charset="0"/>
-                <a:ea typeface="Arial" pitchFamily="34" charset="-122"/>
-                <a:cs typeface="Arial" pitchFamily="34" charset="-120"/>
-              </a:rPr>
-              <a:t>• Dependency mapping</a:t>
-            </a:r>
-            <a:endParaRPr lang="en-US" sz="1100" dirty="0"/>
-          </a:p>
-        </p:txBody>
-      </p:sp>
-      <p:sp>
-        <p:nvSpPr>
-          <p:cNvPr id="10" name="Text 8"/>
-          <p:cNvSpPr/>
-          <p:nvPr/>
-        </p:nvSpPr>
-        <p:spPr>
-          <a:xfrm>
-            <a:off x="457200" y="3749040"/>
-            <a:ext cx="8229600" cy="365760"/>
+              <a:t>All operations logged in chat history</a:t>
+            </a:r>
+            <a:endParaRPr lang="en-US" sz="1000" dirty="0"/>
+          </a:p>
+        </p:txBody>
+      </p:sp>
+      <p:sp>
+        <p:nvSpPr>
+          <p:cNvPr id="19" name="Text 17"/>
+          <p:cNvSpPr/>
+          <p:nvPr/>
+        </p:nvSpPr>
+        <p:spPr>
+          <a:xfrm>
+            <a:off x="457200" y="4114800"/>
+            <a:ext cx="8229600" cy="320040"/>
           </a:xfrm>
           <a:prstGeom prst="rect">
             <a:avLst/>
@@ -5804,17 +7513,17 @@
               <a:buNone/>
             </a:pPr>
             <a:r>
-              <a:rPr lang="en-US" sz="1300" i="1" dirty="0">
-                <a:solidFill>
-                  <a:srgbClr val="333333"/>
-                </a:solidFill>
-                <a:latin typeface="Arial" pitchFamily="34" charset="0"/>
-                <a:ea typeface="Arial" pitchFamily="34" charset="-122"/>
-                <a:cs typeface="Arial" pitchFamily="34" charset="-120"/>
-              </a:rPr>
-              <a:t>Combined these modules provide complete observability for BFF pattern deployments</a:t>
-            </a:r>
-            <a:endParaRPr lang="en-US" sz="1300" dirty="0"/>
+              <a:rPr lang="en-US" sz="1200" i="1" dirty="0">
+                <a:solidFill>
+                  <a:srgbClr val="666666"/>
+                </a:solidFill>
+                <a:latin typeface="Arial" pitchFamily="34" charset="0"/>
+                <a:ea typeface="Arial" pitchFamily="34" charset="-122"/>
+                <a:cs typeface="Arial" pitchFamily="34" charset="-120"/>
+              </a:rPr>
+              <a:t>Example: Type a command in Teams → ChatOps executes → Results posted back</a:t>
+            </a:r>
+            <a:endParaRPr lang="en-US" sz="1200" dirty="0"/>
           </a:p>
         </p:txBody>
       </p:sp>
@@ -5883,7 +7592,7 @@
                 <a:ea typeface="Arial" pitchFamily="34" charset="-122"/>
                 <a:cs typeface="Arial" pitchFamily="34" charset="-120"/>
               </a:rPr>
-              <a:t>Bug Fixes &amp; Maintenance</a:t>
+              <a:t>LANXY Infrastructure</a:t>
             </a:r>
             <a:endParaRPr lang="en-US" sz="3200" dirty="0"/>
           </a:p>
@@ -5891,14 +7600,53 @@
       </p:sp>
       <p:sp>
         <p:nvSpPr>
-          <p:cNvPr id="3" name="Shape 1"/>
-          <p:cNvSpPr/>
-          <p:nvPr/>
-        </p:nvSpPr>
-        <p:spPr>
-          <a:xfrm>
-            <a:off x="457200" y="1005840"/>
-            <a:ext cx="3931920" cy="1554480"/>
+          <p:cNvPr id="3" name="Text 1"/>
+          <p:cNvSpPr/>
+          <p:nvPr/>
+        </p:nvSpPr>
+        <p:spPr>
+          <a:xfrm>
+            <a:off x="457200" y="868680"/>
+            <a:ext cx="8229600" cy="274320"/>
+          </a:xfrm>
+          <a:prstGeom prst="rect">
+            <a:avLst/>
+          </a:prstGeom>
+          <a:noFill/>
+          <a:ln/>
+        </p:spPr>
+        <p:txBody>
+          <a:bodyPr wrap="square" rtlCol="0" anchor="ctr"/>
+          <a:lstStyle/>
+          <a:p>
+            <a:pPr indent="0" marL="0">
+              <a:buNone/>
+            </a:pPr>
+            <a:r>
+              <a:rPr lang="en-US" sz="1300" dirty="0">
+                <a:solidFill>
+                  <a:srgbClr val="666666"/>
+                </a:solidFill>
+                <a:latin typeface="Arial" pitchFamily="34" charset="0"/>
+                <a:ea typeface="Arial" pitchFamily="34" charset="-122"/>
+                <a:cs typeface="Arial" pitchFamily="34" charset="-120"/>
+              </a:rPr>
+              <a:t>Reverse proxy solution for CORS handling</a:t>
+            </a:r>
+            <a:endParaRPr lang="en-US" sz="1300" dirty="0"/>
+          </a:p>
+        </p:txBody>
+      </p:sp>
+      <p:sp>
+        <p:nvSpPr>
+          <p:cNvPr id="4" name="Shape 2"/>
+          <p:cNvSpPr/>
+          <p:nvPr/>
+        </p:nvSpPr>
+        <p:spPr>
+          <a:xfrm>
+            <a:off x="457200" y="1280160"/>
+            <a:ext cx="3931920" cy="2011680"/>
           </a:xfrm>
           <a:prstGeom prst="rect">
             <a:avLst/>
@@ -5911,13 +7659,13 @@
       </p:sp>
       <p:sp>
         <p:nvSpPr>
-          <p:cNvPr id="4" name="Text 2"/>
-          <p:cNvSpPr/>
-          <p:nvPr/>
-        </p:nvSpPr>
-        <p:spPr>
-          <a:xfrm>
-            <a:off x="640080" y="1097280"/>
+          <p:cNvPr id="5" name="Text 3"/>
+          <p:cNvSpPr/>
+          <p:nvPr/>
+        </p:nvSpPr>
+        <p:spPr>
+          <a:xfrm>
+            <a:off x="640080" y="1371600"/>
             <a:ext cx="3657600" cy="320040"/>
           </a:xfrm>
           <a:prstGeom prst="rect">
@@ -5942,7 +7690,7 @@
                 <a:ea typeface="Arial" pitchFamily="34" charset="-122"/>
                 <a:cs typeface="Arial" pitchFamily="34" charset="-120"/>
               </a:rPr>
-              <a:t>Build Issues</a:t>
+              <a:t>Infrastructure &amp; Config</a:t>
             </a:r>
             <a:endParaRPr lang="en-US" sz="1400" dirty="0"/>
           </a:p>
@@ -5950,14 +7698,14 @@
       </p:sp>
       <p:sp>
         <p:nvSpPr>
-          <p:cNvPr id="5" name="Text 3"/>
-          <p:cNvSpPr/>
-          <p:nvPr/>
-        </p:nvSpPr>
-        <p:spPr>
-          <a:xfrm>
-            <a:off x="731520" y="1463040"/>
-            <a:ext cx="3474720" cy="1005840"/>
+          <p:cNvPr id="6" name="Text 4"/>
+          <p:cNvSpPr/>
+          <p:nvPr/>
+        </p:nvSpPr>
+        <p:spPr>
+          <a:xfrm>
+            <a:off x="822960" y="1737360"/>
+            <a:ext cx="3383280" cy="1371600"/>
           </a:xfrm>
           <a:prstGeom prst="rect">
             <a:avLst/>
@@ -5981,7 +7729,7 @@
                 <a:ea typeface="Arial" pitchFamily="34" charset="-122"/>
                 <a:cs typeface="Arial" pitchFamily="34" charset="-120"/>
               </a:rPr>
-              <a:t>✓ Resolved compilation errors</a:t>
+              <a:t>• Move HA default VM (2079 → 2078)</a:t>
             </a:r>
             <a:endParaRPr lang="en-US" sz="1200" dirty="0"/>
           </a:p>
@@ -5998,22 +7746,39 @@
                 <a:ea typeface="Arial" pitchFamily="34" charset="-122"/>
                 <a:cs typeface="Arial" pitchFamily="34" charset="-120"/>
               </a:rPr>
-              <a:t>✓ Fixed dependency conflicts</a:t>
+              <a:t>• Outbound config for wsi02</a:t>
             </a:r>
             <a:endParaRPr lang="en-US" sz="1200" dirty="0"/>
           </a:p>
-        </p:txBody>
-      </p:sp>
-      <p:sp>
-        <p:nvSpPr>
-          <p:cNvPr id="6" name="Shape 4"/>
-          <p:cNvSpPr/>
-          <p:nvPr/>
-        </p:nvSpPr>
-        <p:spPr>
-          <a:xfrm>
-            <a:off x="4754880" y="1005840"/>
-            <a:ext cx="3931920" cy="1554480"/>
+          <a:p>
+            <a:pPr indent="0" marL="0">
+              <a:buNone/>
+            </a:pPr>
+            <a:r>
+              <a:rPr lang="en-US" sz="1200" dirty="0">
+                <a:solidFill>
+                  <a:srgbClr val="333333"/>
+                </a:solidFill>
+                <a:latin typeface="Arial" pitchFamily="34" charset="0"/>
+                <a:ea typeface="Arial" pitchFamily="34" charset="-122"/>
+                <a:cs typeface="Arial" pitchFamily="34" charset="-120"/>
+              </a:rPr>
+              <a:t>• Schedule adjustment for morning startup</a:t>
+            </a:r>
+            <a:endParaRPr lang="en-US" sz="1200" dirty="0"/>
+          </a:p>
+        </p:txBody>
+      </p:sp>
+      <p:sp>
+        <p:nvSpPr>
+          <p:cNvPr id="7" name="Shape 5"/>
+          <p:cNvSpPr/>
+          <p:nvPr/>
+        </p:nvSpPr>
+        <p:spPr>
+          <a:xfrm>
+            <a:off x="4754880" y="1280160"/>
+            <a:ext cx="3931920" cy="2011680"/>
           </a:xfrm>
           <a:prstGeom prst="rect">
             <a:avLst/>
@@ -6026,13 +7791,13 @@
       </p:sp>
       <p:sp>
         <p:nvSpPr>
-          <p:cNvPr id="7" name="Text 5"/>
-          <p:cNvSpPr/>
-          <p:nvPr/>
-        </p:nvSpPr>
-        <p:spPr>
-          <a:xfrm>
-            <a:off x="4937760" y="1097280"/>
+          <p:cNvPr id="8" name="Text 6"/>
+          <p:cNvSpPr/>
+          <p:nvPr/>
+        </p:nvSpPr>
+        <p:spPr>
+          <a:xfrm>
+            <a:off x="4937760" y="1371600"/>
             <a:ext cx="3657600" cy="320040"/>
           </a:xfrm>
           <a:prstGeom prst="rect">
@@ -6057,7 +7822,7 @@
                 <a:ea typeface="Arial" pitchFamily="34" charset="-122"/>
                 <a:cs typeface="Arial" pitchFamily="34" charset="-120"/>
               </a:rPr>
-              <a:t>App Service</a:t>
+              <a:t>Monitoring &amp; Fixes</a:t>
             </a:r>
             <a:endParaRPr lang="en-US" sz="1400" dirty="0"/>
           </a:p>
@@ -6065,14 +7830,14 @@
       </p:sp>
       <p:sp>
         <p:nvSpPr>
-          <p:cNvPr id="8" name="Text 6"/>
-          <p:cNvSpPr/>
-          <p:nvPr/>
-        </p:nvSpPr>
-        <p:spPr>
-          <a:xfrm>
-            <a:off x="5029200" y="1463040"/>
-            <a:ext cx="3474720" cy="1005840"/>
+          <p:cNvPr id="9" name="Text 7"/>
+          <p:cNvSpPr/>
+          <p:nvPr/>
+        </p:nvSpPr>
+        <p:spPr>
+          <a:xfrm>
+            <a:off x="4937760" y="1737360"/>
+            <a:ext cx="3566160" cy="1371600"/>
           </a:xfrm>
           <a:prstGeom prst="rect">
             <a:avLst/>
@@ -6096,7 +7861,7 @@
                 <a:ea typeface="Arial" pitchFamily="34" charset="-122"/>
                 <a:cs typeface="Arial" pitchFamily="34" charset="-120"/>
               </a:rPr>
-              <a:t>✓ Removal troubleshooting resolved</a:t>
+              <a:t>• Review and update alerts for Lanxy</a:t>
             </a:r>
             <a:endParaRPr lang="en-US" sz="1200" dirty="0"/>
           </a:p>
@@ -6113,7 +7878,7 @@
                 <a:ea typeface="Arial" pitchFamily="34" charset="-122"/>
                 <a:cs typeface="Arial" pitchFamily="34" charset="-120"/>
               </a:rPr>
-              <a:t>✓ Cleanup process improved</a:t>
+              <a:t>• Fix FTFY high for proxy app</a:t>
             </a:r>
             <a:endParaRPr lang="en-US" sz="1200" dirty="0"/>
           </a:p>
@@ -6121,229 +7886,156 @@
       </p:sp>
       <p:sp>
         <p:nvSpPr>
-          <p:cNvPr id="9" name="Shape 7"/>
-          <p:cNvSpPr/>
-          <p:nvPr/>
-        </p:nvSpPr>
-        <p:spPr>
-          <a:xfrm>
-            <a:off x="457200" y="2743200"/>
-            <a:ext cx="3931920" cy="1554480"/>
+          <p:cNvPr id="10" name="Text 8"/>
+          <p:cNvSpPr/>
+          <p:nvPr/>
+        </p:nvSpPr>
+        <p:spPr>
+          <a:xfrm>
+            <a:off x="457200" y="3474720"/>
+            <a:ext cx="8229600" cy="320040"/>
+          </a:xfrm>
+          <a:prstGeom prst="rect">
+            <a:avLst/>
+          </a:prstGeom>
+          <a:noFill/>
+          <a:ln/>
+        </p:spPr>
+        <p:txBody>
+          <a:bodyPr wrap="square" rtlCol="0" anchor="ctr"/>
+          <a:lstStyle/>
+          <a:p>
+            <a:pPr indent="0" marL="0">
+              <a:buNone/>
+            </a:pPr>
+            <a:r>
+              <a:rPr lang="en-US" sz="1400" b="1" dirty="0">
+                <a:solidFill>
+                  <a:srgbClr val="1A1A1A"/>
+                </a:solidFill>
+                <a:latin typeface="Arial" pitchFamily="34" charset="0"/>
+                <a:ea typeface="Arial" pitchFamily="34" charset="-122"/>
+                <a:cs typeface="Arial" pitchFamily="34" charset="-120"/>
+              </a:rPr>
+              <a:t>Environments Updated</a:t>
+            </a:r>
+            <a:endParaRPr lang="en-US" sz="1400" dirty="0"/>
+          </a:p>
+        </p:txBody>
+      </p:sp>
+      <p:sp>
+        <p:nvSpPr>
+          <p:cNvPr id="11" name="Shape 9"/>
+          <p:cNvSpPr/>
+          <p:nvPr/>
+        </p:nvSpPr>
+        <p:spPr>
+          <a:xfrm>
+            <a:off x="457200" y="3840480"/>
+            <a:ext cx="2011680" cy="548640"/>
           </a:xfrm>
           <a:prstGeom prst="rect">
             <a:avLst/>
           </a:prstGeom>
           <a:solidFill>
-            <a:srgbClr val="E5E5E5"/>
+            <a:srgbClr val="1A1A1A"/>
           </a:solidFill>
           <a:ln/>
         </p:spPr>
       </p:sp>
       <p:sp>
         <p:nvSpPr>
-          <p:cNvPr id="10" name="Text 8"/>
-          <p:cNvSpPr/>
-          <p:nvPr/>
-        </p:nvSpPr>
-        <p:spPr>
-          <a:xfrm>
-            <a:off x="640080" y="2834640"/>
-            <a:ext cx="3657600" cy="320040"/>
-          </a:xfrm>
-          <a:prstGeom prst="rect">
-            <a:avLst/>
-          </a:prstGeom>
-          <a:noFill/>
-          <a:ln/>
-        </p:spPr>
-        <p:txBody>
-          <a:bodyPr wrap="square" rtlCol="0" anchor="ctr"/>
-          <a:lstStyle/>
-          <a:p>
-            <a:pPr indent="0" marL="0">
-              <a:buNone/>
-            </a:pPr>
-            <a:r>
-              <a:rPr lang="en-US" sz="1400" b="1" dirty="0">
-                <a:solidFill>
-                  <a:srgbClr val="1A1A1A"/>
-                </a:solidFill>
-                <a:latin typeface="Arial" pitchFamily="34" charset="0"/>
-                <a:ea typeface="Arial" pitchFamily="34" charset="-122"/>
-                <a:cs typeface="Arial" pitchFamily="34" charset="-120"/>
-              </a:rPr>
-              <a:t>CI/CD Pipeline</a:t>
-            </a:r>
-            <a:endParaRPr lang="en-US" sz="1400" dirty="0"/>
-          </a:p>
-        </p:txBody>
-      </p:sp>
-      <p:sp>
-        <p:nvSpPr>
-          <p:cNvPr id="11" name="Text 9"/>
-          <p:cNvSpPr/>
-          <p:nvPr/>
-        </p:nvSpPr>
-        <p:spPr>
-          <a:xfrm>
-            <a:off x="731520" y="3200400"/>
-            <a:ext cx="3474720" cy="1005840"/>
-          </a:xfrm>
-          <a:prstGeom prst="rect">
-            <a:avLst/>
-          </a:prstGeom>
-          <a:noFill/>
-          <a:ln/>
-        </p:spPr>
-        <p:txBody>
-          <a:bodyPr wrap="square" rtlCol="0" anchor="ctr"/>
-          <a:lstStyle/>
-          <a:p>
-            <a:pPr indent="0" marL="0">
+          <p:cNvPr id="12" name="Text 10"/>
+          <p:cNvSpPr/>
+          <p:nvPr/>
+        </p:nvSpPr>
+        <p:spPr>
+          <a:xfrm>
+            <a:off x="457200" y="3977640"/>
+            <a:ext cx="2011680" cy="274320"/>
+          </a:xfrm>
+          <a:prstGeom prst="rect">
+            <a:avLst/>
+          </a:prstGeom>
+          <a:noFill/>
+          <a:ln/>
+        </p:spPr>
+        <p:txBody>
+          <a:bodyPr wrap="square" rtlCol="0" anchor="ctr"/>
+          <a:lstStyle/>
+          <a:p>
+            <a:pPr algn="ctr" indent="0" marL="0">
               <a:buNone/>
             </a:pPr>
             <a:r>
               <a:rPr lang="en-US" sz="1200" dirty="0">
                 <a:solidFill>
-                  <a:srgbClr val="333333"/>
-                </a:solidFill>
-                <a:latin typeface="Arial" pitchFamily="34" charset="0"/>
-                <a:ea typeface="Arial" pitchFamily="34" charset="-122"/>
-                <a:cs typeface="Arial" pitchFamily="34" charset="-120"/>
-              </a:rPr>
-              <a:t>✓ Pipeline issues fixed</a:t>
+                  <a:srgbClr val="FFFFFF"/>
+                </a:solidFill>
+                <a:latin typeface="Arial" pitchFamily="34" charset="0"/>
+                <a:ea typeface="Arial" pitchFamily="34" charset="-122"/>
+                <a:cs typeface="Arial" pitchFamily="34" charset="-120"/>
+              </a:rPr>
+              <a:t>Development</a:t>
             </a:r>
             <a:endParaRPr lang="en-US" sz="1200" dirty="0"/>
           </a:p>
-          <a:p>
-            <a:pPr indent="0" marL="0">
+        </p:txBody>
+      </p:sp>
+      <p:sp>
+        <p:nvSpPr>
+          <p:cNvPr id="13" name="Shape 11"/>
+          <p:cNvSpPr/>
+          <p:nvPr/>
+        </p:nvSpPr>
+        <p:spPr>
+          <a:xfrm>
+            <a:off x="2651760" y="3840480"/>
+            <a:ext cx="2011680" cy="548640"/>
+          </a:xfrm>
+          <a:prstGeom prst="rect">
+            <a:avLst/>
+          </a:prstGeom>
+          <a:solidFill>
+            <a:srgbClr val="1A1A1A"/>
+          </a:solidFill>
+          <a:ln/>
+        </p:spPr>
+      </p:sp>
+      <p:sp>
+        <p:nvSpPr>
+          <p:cNvPr id="14" name="Text 12"/>
+          <p:cNvSpPr/>
+          <p:nvPr/>
+        </p:nvSpPr>
+        <p:spPr>
+          <a:xfrm>
+            <a:off x="2651760" y="3977640"/>
+            <a:ext cx="2011680" cy="274320"/>
+          </a:xfrm>
+          <a:prstGeom prst="rect">
+            <a:avLst/>
+          </a:prstGeom>
+          <a:noFill/>
+          <a:ln/>
+        </p:spPr>
+        <p:txBody>
+          <a:bodyPr wrap="square" rtlCol="0" anchor="ctr"/>
+          <a:lstStyle/>
+          <a:p>
+            <a:pPr algn="ctr" indent="0" marL="0">
               <a:buNone/>
             </a:pPr>
             <a:r>
               <a:rPr lang="en-US" sz="1200" dirty="0">
                 <a:solidFill>
-                  <a:srgbClr val="333333"/>
-                </a:solidFill>
-                <a:latin typeface="Arial" pitchFamily="34" charset="0"/>
-                <a:ea typeface="Arial" pitchFamily="34" charset="-122"/>
-                <a:cs typeface="Arial" pitchFamily="34" charset="-120"/>
-              </a:rPr>
-              <a:t>✓ Deployment reliability improved</a:t>
-            </a:r>
-            <a:endParaRPr lang="en-US" sz="1200" dirty="0"/>
-          </a:p>
-        </p:txBody>
-      </p:sp>
-      <p:sp>
-        <p:nvSpPr>
-          <p:cNvPr id="12" name="Shape 10"/>
-          <p:cNvSpPr/>
-          <p:nvPr/>
-        </p:nvSpPr>
-        <p:spPr>
-          <a:xfrm>
-            <a:off x="4754880" y="2743200"/>
-            <a:ext cx="3931920" cy="1554480"/>
-          </a:xfrm>
-          <a:prstGeom prst="rect">
-            <a:avLst/>
-          </a:prstGeom>
-          <a:solidFill>
-            <a:srgbClr val="E5E5E5"/>
-          </a:solidFill>
-          <a:ln/>
-        </p:spPr>
-      </p:sp>
-      <p:sp>
-        <p:nvSpPr>
-          <p:cNvPr id="13" name="Text 11"/>
-          <p:cNvSpPr/>
-          <p:nvPr/>
-        </p:nvSpPr>
-        <p:spPr>
-          <a:xfrm>
-            <a:off x="4937760" y="2834640"/>
-            <a:ext cx="3657600" cy="320040"/>
-          </a:xfrm>
-          <a:prstGeom prst="rect">
-            <a:avLst/>
-          </a:prstGeom>
-          <a:noFill/>
-          <a:ln/>
-        </p:spPr>
-        <p:txBody>
-          <a:bodyPr wrap="square" rtlCol="0" anchor="ctr"/>
-          <a:lstStyle/>
-          <a:p>
-            <a:pPr indent="0" marL="0">
-              <a:buNone/>
-            </a:pPr>
-            <a:r>
-              <a:rPr lang="en-US" sz="1400" b="1" dirty="0">
-                <a:solidFill>
-                  <a:srgbClr val="1A1A1A"/>
-                </a:solidFill>
-                <a:latin typeface="Arial" pitchFamily="34" charset="0"/>
-                <a:ea typeface="Arial" pitchFamily="34" charset="-122"/>
-                <a:cs typeface="Arial" pitchFamily="34" charset="-120"/>
-              </a:rPr>
-              <a:t>Infrastructure</a:t>
-            </a:r>
-            <a:endParaRPr lang="en-US" sz="1400" dirty="0"/>
-          </a:p>
-        </p:txBody>
-      </p:sp>
-      <p:sp>
-        <p:nvSpPr>
-          <p:cNvPr id="14" name="Text 12"/>
-          <p:cNvSpPr/>
-          <p:nvPr/>
-        </p:nvSpPr>
-        <p:spPr>
-          <a:xfrm>
-            <a:off x="5029200" y="3200400"/>
-            <a:ext cx="3474720" cy="1005840"/>
-          </a:xfrm>
-          <a:prstGeom prst="rect">
-            <a:avLst/>
-          </a:prstGeom>
-          <a:noFill/>
-          <a:ln/>
-        </p:spPr>
-        <p:txBody>
-          <a:bodyPr wrap="square" rtlCol="0" anchor="ctr"/>
-          <a:lstStyle/>
-          <a:p>
-            <a:pPr indent="0" marL="0">
-              <a:buNone/>
-            </a:pPr>
-            <a:r>
-              <a:rPr lang="en-US" sz="1200" dirty="0">
-                <a:solidFill>
-                  <a:srgbClr val="333333"/>
-                </a:solidFill>
-                <a:latin typeface="Arial" pitchFamily="34" charset="0"/>
-                <a:ea typeface="Arial" pitchFamily="34" charset="-122"/>
-                <a:cs typeface="Arial" pitchFamily="34" charset="-120"/>
-              </a:rPr>
-              <a:t>✓ Consolidation for BFF patterns</a:t>
-            </a:r>
-            <a:endParaRPr lang="en-US" sz="1200" dirty="0"/>
-          </a:p>
-          <a:p>
-            <a:pPr indent="0" marL="0">
-              <a:buNone/>
-            </a:pPr>
-            <a:r>
-              <a:rPr lang="en-US" sz="1200" dirty="0">
-                <a:solidFill>
-                  <a:srgbClr val="333333"/>
-                </a:solidFill>
-                <a:latin typeface="Arial" pitchFamily="34" charset="0"/>
-                <a:ea typeface="Arial" pitchFamily="34" charset="-122"/>
-                <a:cs typeface="Arial" pitchFamily="34" charset="-120"/>
-              </a:rPr>
-              <a:t>✓ Policy compliance updates</a:t>
+                  <a:srgbClr val="FFFFFF"/>
+                </a:solidFill>
+                <a:latin typeface="Arial" pitchFamily="34" charset="0"/>
+                <a:ea typeface="Arial" pitchFamily="34" charset="-122"/>
+                <a:cs typeface="Arial" pitchFamily="34" charset="-120"/>
+              </a:rPr>
+              <a:t>Test</a:t>
             </a:r>
             <a:endParaRPr lang="en-US" sz="1200" dirty="0"/>
           </a:p>
